--- a/doc/Figure.pptx
+++ b/doc/Figure.pptx
@@ -629,7 +629,7 @@
           <a:p>
             <a:fld id="{2701BA64-2DB9-41C3-96A1-2E5F58465B70}" type="datetimeFigureOut">
               <a:rPr lang="zh-CN" altLang="en-US" smtClean="0"/>
-              <a:t>2025/11/24</a:t>
+              <a:t>2025/11/28</a:t>
             </a:fld>
             <a:endParaRPr lang="zh-CN" altLang="en-US"/>
           </a:p>
@@ -1027,7 +1027,7 @@
           <a:p>
             <a:fld id="{FA1F4D98-94C1-47F8-82C9-964CF0395BC0}" type="datetimeFigureOut">
               <a:rPr lang="zh-CN" altLang="en-US" smtClean="0"/>
-              <a:t>2025/11/24</a:t>
+              <a:t>2025/11/28</a:t>
             </a:fld>
             <a:endParaRPr lang="zh-CN" altLang="en-US"/>
           </a:p>
@@ -1197,7 +1197,7 @@
           <a:p>
             <a:fld id="{FA1F4D98-94C1-47F8-82C9-964CF0395BC0}" type="datetimeFigureOut">
               <a:rPr lang="zh-CN" altLang="en-US" smtClean="0"/>
-              <a:t>2025/11/24</a:t>
+              <a:t>2025/11/28</a:t>
             </a:fld>
             <a:endParaRPr lang="zh-CN" altLang="en-US"/>
           </a:p>
@@ -1377,7 +1377,7 @@
           <a:p>
             <a:fld id="{FA1F4D98-94C1-47F8-82C9-964CF0395BC0}" type="datetimeFigureOut">
               <a:rPr lang="zh-CN" altLang="en-US" smtClean="0"/>
-              <a:t>2025/11/24</a:t>
+              <a:t>2025/11/28</a:t>
             </a:fld>
             <a:endParaRPr lang="zh-CN" altLang="en-US"/>
           </a:p>
@@ -1547,7 +1547,7 @@
           <a:p>
             <a:fld id="{FA1F4D98-94C1-47F8-82C9-964CF0395BC0}" type="datetimeFigureOut">
               <a:rPr lang="zh-CN" altLang="en-US" smtClean="0"/>
-              <a:t>2025/11/24</a:t>
+              <a:t>2025/11/28</a:t>
             </a:fld>
             <a:endParaRPr lang="zh-CN" altLang="en-US"/>
           </a:p>
@@ -1791,7 +1791,7 @@
           <a:p>
             <a:fld id="{FA1F4D98-94C1-47F8-82C9-964CF0395BC0}" type="datetimeFigureOut">
               <a:rPr lang="zh-CN" altLang="en-US" smtClean="0"/>
-              <a:t>2025/11/24</a:t>
+              <a:t>2025/11/28</a:t>
             </a:fld>
             <a:endParaRPr lang="zh-CN" altLang="en-US"/>
           </a:p>
@@ -2023,7 +2023,7 @@
           <a:p>
             <a:fld id="{FA1F4D98-94C1-47F8-82C9-964CF0395BC0}" type="datetimeFigureOut">
               <a:rPr lang="zh-CN" altLang="en-US" smtClean="0"/>
-              <a:t>2025/11/24</a:t>
+              <a:t>2025/11/28</a:t>
             </a:fld>
             <a:endParaRPr lang="zh-CN" altLang="en-US"/>
           </a:p>
@@ -2390,7 +2390,7 @@
           <a:p>
             <a:fld id="{FA1F4D98-94C1-47F8-82C9-964CF0395BC0}" type="datetimeFigureOut">
               <a:rPr lang="zh-CN" altLang="en-US" smtClean="0"/>
-              <a:t>2025/11/24</a:t>
+              <a:t>2025/11/28</a:t>
             </a:fld>
             <a:endParaRPr lang="zh-CN" altLang="en-US"/>
           </a:p>
@@ -2508,7 +2508,7 @@
           <a:p>
             <a:fld id="{FA1F4D98-94C1-47F8-82C9-964CF0395BC0}" type="datetimeFigureOut">
               <a:rPr lang="zh-CN" altLang="en-US" smtClean="0"/>
-              <a:t>2025/11/24</a:t>
+              <a:t>2025/11/28</a:t>
             </a:fld>
             <a:endParaRPr lang="zh-CN" altLang="en-US"/>
           </a:p>
@@ -2603,7 +2603,7 @@
           <a:p>
             <a:fld id="{FA1F4D98-94C1-47F8-82C9-964CF0395BC0}" type="datetimeFigureOut">
               <a:rPr lang="zh-CN" altLang="en-US" smtClean="0"/>
-              <a:t>2025/11/24</a:t>
+              <a:t>2025/11/28</a:t>
             </a:fld>
             <a:endParaRPr lang="zh-CN" altLang="en-US"/>
           </a:p>
@@ -2880,7 +2880,7 @@
           <a:p>
             <a:fld id="{FA1F4D98-94C1-47F8-82C9-964CF0395BC0}" type="datetimeFigureOut">
               <a:rPr lang="zh-CN" altLang="en-US" smtClean="0"/>
-              <a:t>2025/11/24</a:t>
+              <a:t>2025/11/28</a:t>
             </a:fld>
             <a:endParaRPr lang="zh-CN" altLang="en-US"/>
           </a:p>
@@ -3137,7 +3137,7 @@
           <a:p>
             <a:fld id="{FA1F4D98-94C1-47F8-82C9-964CF0395BC0}" type="datetimeFigureOut">
               <a:rPr lang="zh-CN" altLang="en-US" smtClean="0"/>
-              <a:t>2025/11/24</a:t>
+              <a:t>2025/11/28</a:t>
             </a:fld>
             <a:endParaRPr lang="zh-CN" altLang="en-US"/>
           </a:p>
@@ -3350,7 +3350,7 @@
           <a:p>
             <a:fld id="{FA1F4D98-94C1-47F8-82C9-964CF0395BC0}" type="datetimeFigureOut">
               <a:rPr lang="zh-CN" altLang="en-US" smtClean="0"/>
-              <a:t>2025/11/24</a:t>
+              <a:t>2025/11/28</a:t>
             </a:fld>
             <a:endParaRPr lang="zh-CN" altLang="en-US"/>
           </a:p>
@@ -3769,8 +3769,8 @@
         </p:nvSpPr>
         <p:spPr>
           <a:xfrm>
-            <a:off x="1023161" y="1877550"/>
-            <a:ext cx="3290286" cy="376440"/>
+            <a:off x="2385302" y="1911882"/>
+            <a:ext cx="2054268" cy="376440"/>
           </a:xfrm>
           <a:prstGeom prst="rect">
             <a:avLst/>
@@ -3838,8 +3838,8 @@
         </p:nvSpPr>
         <p:spPr>
           <a:xfrm>
-            <a:off x="4802570" y="1946213"/>
-            <a:ext cx="4190080" cy="307777"/>
+            <a:off x="161202" y="1911882"/>
+            <a:ext cx="2153178" cy="307777"/>
           </a:xfrm>
           <a:prstGeom prst="rect">
             <a:avLst/>
@@ -3851,6 +3851,7 @@
           </a:bodyPr>
           <a:lstStyle/>
           <a:p>
+            <a:pPr algn="r"/>
             <a:r>
               <a:rPr lang="zh-CN" altLang="en-US" sz="1400">
                 <a:latin typeface="Abadi" panose="020B0604020104020204" pitchFamily="34" charset="0"/>
@@ -3877,8 +3878,8 @@
         </p:nvSpPr>
         <p:spPr>
           <a:xfrm>
-            <a:off x="1023161" y="2452466"/>
-            <a:ext cx="3290286" cy="376440"/>
+            <a:off x="2385302" y="2486798"/>
+            <a:ext cx="2054268" cy="376440"/>
           </a:xfrm>
           <a:prstGeom prst="rect">
             <a:avLst/>
@@ -3946,8 +3947,8 @@
         </p:nvSpPr>
         <p:spPr>
           <a:xfrm>
-            <a:off x="4802569" y="2521129"/>
-            <a:ext cx="4240531" cy="307777"/>
+            <a:off x="161201" y="2486798"/>
+            <a:ext cx="2153178" cy="307777"/>
           </a:xfrm>
           <a:prstGeom prst="rect">
             <a:avLst/>
@@ -3959,6 +3960,7 @@
           </a:bodyPr>
           <a:lstStyle/>
           <a:p>
+            <a:pPr algn="r"/>
             <a:r>
               <a:rPr lang="zh-CN" altLang="en-US" sz="1400">
                 <a:latin typeface="Abadi" panose="020B0604020104020204" pitchFamily="34" charset="0"/>
@@ -3982,8 +3984,8 @@
         </p:nvSpPr>
         <p:spPr>
           <a:xfrm>
-            <a:off x="1023161" y="3052560"/>
-            <a:ext cx="3290286" cy="376440"/>
+            <a:off x="2385302" y="3180139"/>
+            <a:ext cx="2054268" cy="376440"/>
           </a:xfrm>
           <a:prstGeom prst="rect">
             <a:avLst/>
@@ -3993,7 +3995,7 @@
           </a:solidFill>
           <a:ln w="19050">
             <a:solidFill>
-              <a:srgbClr val="9915E8"/>
+              <a:srgbClr val="00B050"/>
             </a:solidFill>
           </a:ln>
           <a:effectLst>
@@ -4051,8 +4053,8 @@
         </p:nvSpPr>
         <p:spPr>
           <a:xfrm>
-            <a:off x="4802569" y="3121223"/>
-            <a:ext cx="4190081" cy="307777"/>
+            <a:off x="161200" y="3245180"/>
+            <a:ext cx="2153178" cy="307777"/>
           </a:xfrm>
           <a:prstGeom prst="rect">
             <a:avLst/>
@@ -4064,6 +4066,7 @@
           </a:bodyPr>
           <a:lstStyle/>
           <a:p>
+            <a:pPr algn="r"/>
             <a:r>
               <a:rPr lang="zh-CN" altLang="en-US" sz="1400">
                 <a:latin typeface="Abadi" panose="020B0604020104020204" pitchFamily="34" charset="0"/>
@@ -4087,8 +4090,8 @@
         </p:nvSpPr>
         <p:spPr>
           <a:xfrm>
-            <a:off x="1023161" y="3721317"/>
-            <a:ext cx="3290286" cy="376440"/>
+            <a:off x="2385302" y="4414333"/>
+            <a:ext cx="2054268" cy="376440"/>
           </a:xfrm>
           <a:prstGeom prst="rect">
             <a:avLst/>
@@ -4156,8 +4159,8 @@
         </p:nvSpPr>
         <p:spPr>
           <a:xfrm>
-            <a:off x="4802569" y="3789980"/>
-            <a:ext cx="4688272" cy="307777"/>
+            <a:off x="161201" y="4414333"/>
+            <a:ext cx="2153178" cy="307777"/>
           </a:xfrm>
           <a:prstGeom prst="rect">
             <a:avLst/>
@@ -4169,11 +4172,12 @@
           </a:bodyPr>
           <a:lstStyle/>
           <a:p>
+            <a:pPr algn="r"/>
             <a:r>
               <a:rPr lang="zh-CN" altLang="en-US" sz="1400">
                 <a:latin typeface="Abadi" panose="020B0604020104020204" pitchFamily="34" charset="0"/>
               </a:rPr>
-              <a:t>枚举类（由于涉及到反向生成问题，枚举类要加判断）</a:t>
+              <a:t>枚举类</a:t>
             </a:r>
           </a:p>
         </p:txBody>
@@ -4192,8 +4196,8 @@
         </p:nvSpPr>
         <p:spPr>
           <a:xfrm>
-            <a:off x="1023161" y="4321411"/>
-            <a:ext cx="3290286" cy="376440"/>
+            <a:off x="2385302" y="3814239"/>
+            <a:ext cx="2054268" cy="376440"/>
           </a:xfrm>
           <a:prstGeom prst="rect">
             <a:avLst/>
@@ -4261,8 +4265,8 @@
         </p:nvSpPr>
         <p:spPr>
           <a:xfrm>
-            <a:off x="4802569" y="4390074"/>
-            <a:ext cx="4190081" cy="307777"/>
+            <a:off x="161200" y="3848570"/>
+            <a:ext cx="2153178" cy="307777"/>
           </a:xfrm>
           <a:prstGeom prst="rect">
             <a:avLst/>
@@ -4274,6 +4278,7 @@
           </a:bodyPr>
           <a:lstStyle/>
           <a:p>
+            <a:pPr algn="r"/>
             <a:r>
               <a:rPr lang="zh-CN" altLang="en-US" sz="1400">
                 <a:latin typeface="Abadi" panose="020B0604020104020204" pitchFamily="34" charset="0"/>
@@ -4297,8 +4302,8 @@
         </p:nvSpPr>
         <p:spPr>
           <a:xfrm>
-            <a:off x="1023161" y="4990168"/>
-            <a:ext cx="3290286" cy="376440"/>
+            <a:off x="2385302" y="5024500"/>
+            <a:ext cx="2054268" cy="376440"/>
           </a:xfrm>
           <a:prstGeom prst="rect">
             <a:avLst/>
@@ -4347,7 +4352,7 @@
                 </a:solidFill>
                 <a:latin typeface="Abadi" panose="020B0604020104020204" pitchFamily="34" charset="0"/>
               </a:rPr>
-              <a:t>Terminal Level</a:t>
+              <a:t>Text Level</a:t>
             </a:r>
           </a:p>
         </p:txBody>
@@ -4366,8 +4371,8 @@
         </p:nvSpPr>
         <p:spPr>
           <a:xfrm>
-            <a:off x="4802569" y="5058831"/>
-            <a:ext cx="4190081" cy="307777"/>
+            <a:off x="161201" y="5024500"/>
+            <a:ext cx="2153178" cy="307777"/>
           </a:xfrm>
           <a:prstGeom prst="rect">
             <a:avLst/>
@@ -4379,6 +4384,7 @@
           </a:bodyPr>
           <a:lstStyle/>
           <a:p>
+            <a:pPr algn="r"/>
             <a:r>
               <a:rPr lang="zh-CN" altLang="en-US" sz="1400">
                 <a:latin typeface="Abadi" panose="020B0604020104020204" pitchFamily="34" charset="0"/>
@@ -4388,6 +4394,1718 @@
           </a:p>
         </p:txBody>
       </p:sp>
+      <p:sp>
+        <p:nvSpPr>
+          <p:cNvPr id="2" name="矩形 1">
+            <a:extLst>
+              <a:ext uri="{FF2B5EF4-FFF2-40B4-BE49-F238E27FC236}">
+                <a16:creationId xmlns:a16="http://schemas.microsoft.com/office/drawing/2014/main" id="{AC93222A-FAD8-FCE7-3287-EDDE162E2244}"/>
+              </a:ext>
+            </a:extLst>
+          </p:cNvPr>
+          <p:cNvSpPr/>
+          <p:nvPr/>
+        </p:nvSpPr>
+        <p:spPr>
+          <a:xfrm>
+            <a:off x="2385302" y="5655446"/>
+            <a:ext cx="2054268" cy="376440"/>
+          </a:xfrm>
+          <a:prstGeom prst="rect">
+            <a:avLst/>
+          </a:prstGeom>
+          <a:solidFill>
+            <a:schemeClr val="bg1"/>
+          </a:solidFill>
+          <a:ln w="19050">
+            <a:solidFill>
+              <a:srgbClr val="EB3857"/>
+            </a:solidFill>
+          </a:ln>
+          <a:effectLst>
+            <a:outerShdw blurRad="50800" dist="38100" dir="2700000" algn="tl" rotWithShape="0">
+              <a:prstClr val="black">
+                <a:alpha val="40000"/>
+              </a:prstClr>
+            </a:outerShdw>
+          </a:effectLst>
+        </p:spPr>
+        <p:style>
+          <a:lnRef idx="2">
+            <a:schemeClr val="accent1">
+              <a:shade val="15000"/>
+            </a:schemeClr>
+          </a:lnRef>
+          <a:fillRef idx="1">
+            <a:schemeClr val="accent1"/>
+          </a:fillRef>
+          <a:effectRef idx="0">
+            <a:schemeClr val="accent1"/>
+          </a:effectRef>
+          <a:fontRef idx="minor">
+            <a:schemeClr val="lt1"/>
+          </a:fontRef>
+        </p:style>
+        <p:txBody>
+          <a:bodyPr rtlCol="0" anchor="ctr"/>
+          <a:lstStyle/>
+          <a:p>
+            <a:pPr algn="ctr"/>
+            <a:r>
+              <a:rPr lang="en-US" altLang="zh-CN" sz="1400">
+                <a:solidFill>
+                  <a:schemeClr val="tx1"/>
+                </a:solidFill>
+                <a:latin typeface="Abadi" panose="020B0604020104020204" pitchFamily="34" charset="0"/>
+              </a:rPr>
+              <a:t>Terminal Level</a:t>
+            </a:r>
+          </a:p>
+        </p:txBody>
+      </p:sp>
+      <p:sp>
+        <p:nvSpPr>
+          <p:cNvPr id="3" name="矩形 2">
+            <a:extLst>
+              <a:ext uri="{FF2B5EF4-FFF2-40B4-BE49-F238E27FC236}">
+                <a16:creationId xmlns:a16="http://schemas.microsoft.com/office/drawing/2014/main" id="{3F342B4B-0184-98E6-0163-76FBB4DBF79A}"/>
+              </a:ext>
+            </a:extLst>
+          </p:cNvPr>
+          <p:cNvSpPr/>
+          <p:nvPr/>
+        </p:nvSpPr>
+        <p:spPr>
+          <a:xfrm>
+            <a:off x="161200" y="5621114"/>
+            <a:ext cx="2153178" cy="307777"/>
+          </a:xfrm>
+          <a:prstGeom prst="rect">
+            <a:avLst/>
+          </a:prstGeom>
+        </p:spPr>
+        <p:txBody>
+          <a:bodyPr wrap="square">
+            <a:spAutoFit/>
+          </a:bodyPr>
+          <a:lstStyle/>
+          <a:p>
+            <a:pPr algn="r"/>
+            <a:r>
+              <a:rPr lang="zh-CN" altLang="en-US" sz="1400">
+                <a:latin typeface="Abadi" panose="020B0604020104020204" pitchFamily="34" charset="0"/>
+              </a:rPr>
+              <a:t>单词</a:t>
+            </a:r>
+          </a:p>
+        </p:txBody>
+      </p:sp>
+      <p:sp>
+        <p:nvSpPr>
+          <p:cNvPr id="18" name="文本框 17">
+            <a:extLst>
+              <a:ext uri="{FF2B5EF4-FFF2-40B4-BE49-F238E27FC236}">
+                <a16:creationId xmlns:a16="http://schemas.microsoft.com/office/drawing/2014/main" id="{0B07055A-4B9C-D53B-C126-DFB6C55B1DB2}"/>
+              </a:ext>
+            </a:extLst>
+          </p:cNvPr>
+          <p:cNvSpPr txBox="1"/>
+          <p:nvPr/>
+        </p:nvSpPr>
+        <p:spPr>
+          <a:xfrm>
+            <a:off x="4510492" y="52028"/>
+            <a:ext cx="4986370" cy="600164"/>
+          </a:xfrm>
+          <a:prstGeom prst="rect">
+            <a:avLst/>
+          </a:prstGeom>
+          <a:noFill/>
+          <a:ln>
+            <a:solidFill>
+              <a:schemeClr val="bg1">
+                <a:lumMod val="85000"/>
+              </a:schemeClr>
+            </a:solidFill>
+          </a:ln>
+        </p:spPr>
+        <p:txBody>
+          <a:bodyPr wrap="square">
+            <a:spAutoFit/>
+          </a:bodyPr>
+          <a:lstStyle/>
+          <a:p>
+            <a:pPr marL="0" marR="0">
+              <a:buNone/>
+            </a:pPr>
+            <a:r>
+              <a:rPr lang="en-US" altLang="zh-CN" sz="1100" b="1">
+                <a:solidFill>
+                  <a:srgbClr val="7F0055"/>
+                </a:solidFill>
+                <a:effectLst/>
+                <a:latin typeface="Consolas" panose="020B0609020204030204" pitchFamily="49" charset="0"/>
+              </a:rPr>
+              <a:t>part</a:t>
+            </a:r>
+            <a:r>
+              <a:rPr lang="en-US" altLang="zh-CN" sz="1100">
+                <a:solidFill>
+                  <a:srgbClr val="000000"/>
+                </a:solidFill>
+                <a:effectLst/>
+                <a:latin typeface="Consolas" panose="020B0609020204030204" pitchFamily="49" charset="0"/>
+              </a:rPr>
+              <a:t> </a:t>
+            </a:r>
+            <a:r>
+              <a:rPr lang="en-US" altLang="zh-CN" sz="1100" b="1">
+                <a:solidFill>
+                  <a:srgbClr val="7F0055"/>
+                </a:solidFill>
+                <a:effectLst/>
+                <a:latin typeface="Consolas" panose="020B0609020204030204" pitchFamily="49" charset="0"/>
+              </a:rPr>
+              <a:t>def</a:t>
+            </a:r>
+            <a:r>
+              <a:rPr lang="en-US" altLang="zh-CN" sz="1100">
+                <a:solidFill>
+                  <a:srgbClr val="000000"/>
+                </a:solidFill>
+                <a:effectLst/>
+                <a:latin typeface="Consolas" panose="020B0609020204030204" pitchFamily="49" charset="0"/>
+              </a:rPr>
+              <a:t> SmallVehicle :&gt; Vehicle {</a:t>
+            </a:r>
+          </a:p>
+          <a:p>
+            <a:pPr marL="0" marR="0">
+              <a:buNone/>
+            </a:pPr>
+            <a:r>
+              <a:rPr lang="en-US" altLang="zh-CN" sz="1100" b="1">
+                <a:solidFill>
+                  <a:srgbClr val="7F0055"/>
+                </a:solidFill>
+                <a:effectLst/>
+                <a:latin typeface="Consolas" panose="020B0609020204030204" pitchFamily="49" charset="0"/>
+              </a:rPr>
+              <a:t>	part</a:t>
+            </a:r>
+            <a:r>
+              <a:rPr lang="en-US" altLang="zh-CN" sz="1100">
+                <a:solidFill>
+                  <a:srgbClr val="000000"/>
+                </a:solidFill>
+                <a:effectLst/>
+                <a:latin typeface="Consolas" panose="020B0609020204030204" pitchFamily="49" charset="0"/>
+              </a:rPr>
+              <a:t> smallEng : SmallEngine </a:t>
+            </a:r>
+            <a:r>
+              <a:rPr lang="en-US" altLang="zh-CN" sz="1100" b="1">
+                <a:solidFill>
+                  <a:srgbClr val="7F0055"/>
+                </a:solidFill>
+                <a:effectLst/>
+                <a:latin typeface="Consolas" panose="020B0609020204030204" pitchFamily="49" charset="0"/>
+              </a:rPr>
+              <a:t>redefines</a:t>
+            </a:r>
+            <a:r>
+              <a:rPr lang="en-US" altLang="zh-CN" sz="1100">
+                <a:solidFill>
+                  <a:srgbClr val="000000"/>
+                </a:solidFill>
+                <a:effectLst/>
+                <a:latin typeface="Consolas" panose="020B0609020204030204" pitchFamily="49" charset="0"/>
+              </a:rPr>
+              <a:t> eng;</a:t>
+            </a:r>
+          </a:p>
+          <a:p>
+            <a:pPr marL="0" marR="0">
+              <a:buNone/>
+            </a:pPr>
+            <a:r>
+              <a:rPr lang="en-US" altLang="zh-CN" sz="1100">
+                <a:solidFill>
+                  <a:srgbClr val="000000"/>
+                </a:solidFill>
+                <a:effectLst/>
+                <a:latin typeface="Consolas" panose="020B0609020204030204" pitchFamily="49" charset="0"/>
+              </a:rPr>
+              <a:t>}</a:t>
+            </a:r>
+          </a:p>
+        </p:txBody>
+      </p:sp>
+      <p:sp>
+        <p:nvSpPr>
+          <p:cNvPr id="20" name="文本框 19">
+            <a:extLst>
+              <a:ext uri="{FF2B5EF4-FFF2-40B4-BE49-F238E27FC236}">
+                <a16:creationId xmlns:a16="http://schemas.microsoft.com/office/drawing/2014/main" id="{FB692485-8A77-1CD4-836F-66EA1B5BA8AB}"/>
+              </a:ext>
+            </a:extLst>
+          </p:cNvPr>
+          <p:cNvSpPr txBox="1"/>
+          <p:nvPr/>
+        </p:nvSpPr>
+        <p:spPr>
+          <a:xfrm>
+            <a:off x="4510492" y="781900"/>
+            <a:ext cx="5267763" cy="523220"/>
+          </a:xfrm>
+          <a:prstGeom prst="rect">
+            <a:avLst/>
+          </a:prstGeom>
+          <a:noFill/>
+          <a:ln>
+            <a:solidFill>
+              <a:schemeClr val="bg1">
+                <a:lumMod val="85000"/>
+              </a:schemeClr>
+            </a:solidFill>
+          </a:ln>
+        </p:spPr>
+        <p:txBody>
+          <a:bodyPr wrap="square">
+            <a:spAutoFit/>
+          </a:bodyPr>
+          <a:lstStyle/>
+          <a:p>
+            <a:pPr marL="0" marR="0">
+              <a:buNone/>
+            </a:pPr>
+            <a:r>
+              <a:rPr lang="en-US" altLang="zh-CN" sz="700">
+                <a:solidFill>
+                  <a:srgbClr val="000000"/>
+                </a:solidFill>
+                <a:effectLst/>
+                <a:latin typeface="Consolas" panose="020B0609020204030204" pitchFamily="49" charset="0"/>
+              </a:rPr>
+              <a:t>AttributeDefinition:</a:t>
+            </a:r>
+          </a:p>
+          <a:p>
+            <a:pPr marL="0" marR="0">
+              <a:buNone/>
+            </a:pPr>
+            <a:r>
+              <a:rPr lang="en-US" altLang="zh-CN" sz="700">
+                <a:solidFill>
+                  <a:srgbClr val="000000"/>
+                </a:solidFill>
+                <a:effectLst/>
+                <a:latin typeface="Consolas" panose="020B0609020204030204" pitchFamily="49" charset="0"/>
+              </a:rPr>
+              <a:t>	MemberPrefix DefinitionPrefix </a:t>
+            </a:r>
+            <a:r>
+              <a:rPr lang="en-US" altLang="zh-CN" sz="700">
+                <a:solidFill>
+                  <a:srgbClr val="2A00FF"/>
+                </a:solidFill>
+                <a:effectLst/>
+                <a:latin typeface="Consolas" panose="020B0609020204030204" pitchFamily="49" charset="0"/>
+              </a:rPr>
+              <a:t>'attribute'</a:t>
+            </a:r>
+            <a:r>
+              <a:rPr lang="en-US" altLang="zh-CN" sz="700">
+                <a:solidFill>
+                  <a:srgbClr val="000000"/>
+                </a:solidFill>
+                <a:effectLst/>
+                <a:latin typeface="Consolas" panose="020B0609020204030204" pitchFamily="49" charset="0"/>
+              </a:rPr>
+              <a:t> </a:t>
+            </a:r>
+            <a:r>
+              <a:rPr lang="en-US" altLang="zh-CN" sz="700">
+                <a:solidFill>
+                  <a:srgbClr val="2A00FF"/>
+                </a:solidFill>
+                <a:effectLst/>
+                <a:latin typeface="Consolas" panose="020B0609020204030204" pitchFamily="49" charset="0"/>
+              </a:rPr>
+              <a:t>'</a:t>
+            </a:r>
+            <a:r>
+              <a:rPr lang="en-US" altLang="zh-CN" sz="700" u="sng">
+                <a:solidFill>
+                  <a:srgbClr val="2A00FF"/>
+                </a:solidFill>
+                <a:effectLst/>
+                <a:latin typeface="Consolas" panose="020B0609020204030204" pitchFamily="49" charset="0"/>
+              </a:rPr>
+              <a:t>def</a:t>
+            </a:r>
+            <a:r>
+              <a:rPr lang="en-US" altLang="zh-CN" sz="700">
+                <a:solidFill>
+                  <a:srgbClr val="2A00FF"/>
+                </a:solidFill>
+                <a:effectLst/>
+                <a:latin typeface="Consolas" panose="020B0609020204030204" pitchFamily="49" charset="0"/>
+              </a:rPr>
+              <a:t>'</a:t>
+            </a:r>
+            <a:r>
+              <a:rPr lang="en-US" altLang="zh-CN" sz="700">
+                <a:solidFill>
+                  <a:srgbClr val="000000"/>
+                </a:solidFill>
+                <a:effectLst/>
+                <a:latin typeface="Consolas" panose="020B0609020204030204" pitchFamily="49" charset="0"/>
+              </a:rPr>
+              <a:t> DefinitionDeclaration </a:t>
+            </a:r>
+          </a:p>
+          <a:p>
+            <a:pPr marL="0" marR="0">
+              <a:buNone/>
+            </a:pPr>
+            <a:r>
+              <a:rPr lang="en-US" altLang="zh-CN" sz="700">
+                <a:solidFill>
+                  <a:srgbClr val="000000"/>
+                </a:solidFill>
+                <a:effectLst/>
+                <a:latin typeface="Consolas" panose="020B0609020204030204" pitchFamily="49" charset="0"/>
+              </a:rPr>
+              <a:t>	(</a:t>
+            </a:r>
+            <a:r>
+              <a:rPr lang="en-US" altLang="zh-CN" sz="700">
+                <a:solidFill>
+                  <a:srgbClr val="2A00FF"/>
+                </a:solidFill>
+                <a:effectLst/>
+                <a:latin typeface="Consolas" panose="020B0609020204030204" pitchFamily="49" charset="0"/>
+              </a:rPr>
+              <a:t>';'</a:t>
+            </a:r>
+            <a:r>
+              <a:rPr lang="en-US" altLang="zh-CN" sz="700">
+                <a:solidFill>
+                  <a:srgbClr val="000000"/>
+                </a:solidFill>
+                <a:effectLst/>
+                <a:latin typeface="Consolas" panose="020B0609020204030204" pitchFamily="49" charset="0"/>
+              </a:rPr>
+              <a:t> | </a:t>
+            </a:r>
+            <a:r>
+              <a:rPr lang="en-US" altLang="zh-CN" sz="700">
+                <a:solidFill>
+                  <a:srgbClr val="2A00FF"/>
+                </a:solidFill>
+                <a:effectLst/>
+                <a:latin typeface="Consolas" panose="020B0609020204030204" pitchFamily="49" charset="0"/>
+              </a:rPr>
+              <a:t>'{'</a:t>
+            </a:r>
+            <a:r>
+              <a:rPr lang="en-US" altLang="zh-CN" sz="700">
+                <a:solidFill>
+                  <a:srgbClr val="000000"/>
+                </a:solidFill>
+                <a:effectLst/>
+                <a:latin typeface="Consolas" panose="020B0609020204030204" pitchFamily="49" charset="0"/>
+              </a:rPr>
+              <a:t> </a:t>
+            </a:r>
+            <a:r>
+              <a:rPr lang="en-US" altLang="zh-CN" sz="700">
+                <a:solidFill>
+                  <a:srgbClr val="000000"/>
+                </a:solidFill>
+                <a:effectLst/>
+                <a:highlight>
+                  <a:srgbClr val="FFFF00"/>
+                </a:highlight>
+                <a:latin typeface="Consolas" panose="020B0609020204030204" pitchFamily="49" charset="0"/>
+              </a:rPr>
+              <a:t>(elements+=DefinitionBodyElement)*</a:t>
+            </a:r>
+            <a:r>
+              <a:rPr lang="en-US" altLang="zh-CN" sz="700">
+                <a:solidFill>
+                  <a:srgbClr val="000000"/>
+                </a:solidFill>
+                <a:effectLst/>
+                <a:latin typeface="Consolas" panose="020B0609020204030204" pitchFamily="49" charset="0"/>
+              </a:rPr>
+              <a:t> </a:t>
+            </a:r>
+            <a:r>
+              <a:rPr lang="en-US" altLang="zh-CN" sz="700">
+                <a:solidFill>
+                  <a:srgbClr val="2A00FF"/>
+                </a:solidFill>
+                <a:effectLst/>
+                <a:latin typeface="Consolas" panose="020B0609020204030204" pitchFamily="49" charset="0"/>
+              </a:rPr>
+              <a:t>'}'</a:t>
+            </a:r>
+            <a:r>
+              <a:rPr lang="en-US" altLang="zh-CN" sz="700">
+                <a:solidFill>
+                  <a:srgbClr val="000000"/>
+                </a:solidFill>
+                <a:effectLst/>
+                <a:latin typeface="Consolas" panose="020B0609020204030204" pitchFamily="49" charset="0"/>
+              </a:rPr>
+              <a:t>)</a:t>
+            </a:r>
+          </a:p>
+          <a:p>
+            <a:pPr marL="0" marR="0">
+              <a:buNone/>
+            </a:pPr>
+            <a:r>
+              <a:rPr lang="en-US" altLang="zh-CN" sz="700">
+                <a:solidFill>
+                  <a:srgbClr val="000000"/>
+                </a:solidFill>
+                <a:effectLst/>
+                <a:latin typeface="Consolas" panose="020B0609020204030204" pitchFamily="49" charset="0"/>
+              </a:rPr>
+              <a:t>;</a:t>
+            </a:r>
+          </a:p>
+        </p:txBody>
+      </p:sp>
+      <p:sp>
+        <p:nvSpPr>
+          <p:cNvPr id="29" name="文本框 28">
+            <a:extLst>
+              <a:ext uri="{FF2B5EF4-FFF2-40B4-BE49-F238E27FC236}">
+                <a16:creationId xmlns:a16="http://schemas.microsoft.com/office/drawing/2014/main" id="{D5883010-9550-1D42-4CAB-E90CE387D185}"/>
+              </a:ext>
+            </a:extLst>
+          </p:cNvPr>
+          <p:cNvSpPr txBox="1"/>
+          <p:nvPr/>
+        </p:nvSpPr>
+        <p:spPr>
+          <a:xfrm>
+            <a:off x="4510492" y="1391886"/>
+            <a:ext cx="2153178" cy="954107"/>
+          </a:xfrm>
+          <a:prstGeom prst="rect">
+            <a:avLst/>
+          </a:prstGeom>
+          <a:noFill/>
+          <a:ln>
+            <a:solidFill>
+              <a:schemeClr val="bg1">
+                <a:lumMod val="85000"/>
+              </a:schemeClr>
+            </a:solidFill>
+          </a:ln>
+        </p:spPr>
+        <p:txBody>
+          <a:bodyPr wrap="square">
+            <a:spAutoFit/>
+          </a:bodyPr>
+          <a:lstStyle>
+            <a:defPPr>
+              <a:defRPr lang="en-US"/>
+            </a:defPPr>
+            <a:lvl1pPr marR="0">
+              <a:buNone/>
+              <a:defRPr sz="900">
+                <a:solidFill>
+                  <a:srgbClr val="000000"/>
+                </a:solidFill>
+                <a:effectLst/>
+                <a:latin typeface="Consolas" panose="020B0609020204030204" pitchFamily="49" charset="0"/>
+              </a:defRPr>
+            </a:lvl1pPr>
+          </a:lstStyle>
+          <a:p>
+            <a:r>
+              <a:rPr lang="en-US" altLang="zh-CN" sz="700"/>
+              <a:t>DefinitionBodyElement:</a:t>
+            </a:r>
+          </a:p>
+          <a:p>
+            <a:pPr lvl="1"/>
+            <a:r>
+              <a:rPr lang="en-US" altLang="zh-CN" sz="700"/>
+              <a:t>AnnotatingElement</a:t>
+            </a:r>
+          </a:p>
+          <a:p>
+            <a:pPr lvl="1"/>
+            <a:r>
+              <a:rPr lang="en-US" altLang="zh-CN" sz="700"/>
+              <a:t>| ImportElement</a:t>
+            </a:r>
+          </a:p>
+          <a:p>
+            <a:pPr lvl="1"/>
+            <a:r>
+              <a:rPr lang="en-US" altLang="zh-CN" sz="700"/>
+              <a:t>| DefinitionElement</a:t>
+            </a:r>
+          </a:p>
+          <a:p>
+            <a:pPr lvl="1"/>
+            <a:r>
+              <a:rPr lang="en-US" altLang="zh-CN" sz="700"/>
+              <a:t>| </a:t>
+            </a:r>
+            <a:r>
+              <a:rPr lang="en-US" altLang="zh-CN" sz="700">
+                <a:highlight>
+                  <a:srgbClr val="FFFF00"/>
+                </a:highlight>
+              </a:rPr>
+              <a:t>UsageElement</a:t>
+            </a:r>
+          </a:p>
+          <a:p>
+            <a:pPr lvl="1"/>
+            <a:r>
+              <a:rPr lang="en-US" altLang="zh-CN" sz="700"/>
+              <a:t>| CodeAnnotation</a:t>
+            </a:r>
+          </a:p>
+          <a:p>
+            <a:pPr lvl="1"/>
+            <a:r>
+              <a:rPr lang="en-US" altLang="zh-CN" sz="700"/>
+              <a:t>| AliasElement</a:t>
+            </a:r>
+          </a:p>
+          <a:p>
+            <a:r>
+              <a:rPr lang="en-US" altLang="zh-CN" sz="700"/>
+              <a:t>;</a:t>
+            </a:r>
+          </a:p>
+        </p:txBody>
+      </p:sp>
+      <p:sp>
+        <p:nvSpPr>
+          <p:cNvPr id="31" name="文本框 30">
+            <a:extLst>
+              <a:ext uri="{FF2B5EF4-FFF2-40B4-BE49-F238E27FC236}">
+                <a16:creationId xmlns:a16="http://schemas.microsoft.com/office/drawing/2014/main" id="{D21A927C-0CD3-D54A-9BA5-5105C3D4CAD2}"/>
+              </a:ext>
+            </a:extLst>
+          </p:cNvPr>
+          <p:cNvSpPr txBox="1"/>
+          <p:nvPr/>
+        </p:nvSpPr>
+        <p:spPr>
+          <a:xfrm>
+            <a:off x="4553163" y="2432759"/>
+            <a:ext cx="1746830" cy="523220"/>
+          </a:xfrm>
+          <a:prstGeom prst="rect">
+            <a:avLst/>
+          </a:prstGeom>
+          <a:noFill/>
+          <a:ln>
+            <a:solidFill>
+              <a:schemeClr val="bg1">
+                <a:lumMod val="85000"/>
+              </a:schemeClr>
+            </a:solidFill>
+          </a:ln>
+        </p:spPr>
+        <p:txBody>
+          <a:bodyPr wrap="square">
+            <a:spAutoFit/>
+          </a:bodyPr>
+          <a:lstStyle>
+            <a:defPPr>
+              <a:defRPr lang="en-US"/>
+            </a:defPPr>
+            <a:lvl1pPr marR="0">
+              <a:buNone/>
+              <a:defRPr sz="700">
+                <a:solidFill>
+                  <a:srgbClr val="000000"/>
+                </a:solidFill>
+                <a:effectLst/>
+                <a:latin typeface="Consolas" panose="020B0609020204030204" pitchFamily="49" charset="0"/>
+              </a:defRPr>
+            </a:lvl1pPr>
+            <a:lvl2pPr lvl="1">
+              <a:defRPr sz="700"/>
+            </a:lvl2pPr>
+          </a:lstStyle>
+          <a:p>
+            <a:r>
+              <a:rPr lang="en-US" altLang="zh-CN"/>
+              <a:t>UsageElement:</a:t>
+            </a:r>
+          </a:p>
+          <a:p>
+            <a:pPr lvl="1"/>
+            <a:r>
+              <a:rPr lang="en-US" altLang="zh-CN"/>
+              <a:t>NonOccurrenceUsageElement </a:t>
+            </a:r>
+          </a:p>
+          <a:p>
+            <a:pPr lvl="1"/>
+            <a:r>
+              <a:rPr lang="en-US" altLang="zh-CN"/>
+              <a:t>| </a:t>
+            </a:r>
+            <a:r>
+              <a:rPr lang="en-US" altLang="zh-CN">
+                <a:highlight>
+                  <a:srgbClr val="FFFF00"/>
+                </a:highlight>
+              </a:rPr>
+              <a:t>OccurrenceUsageElement</a:t>
+            </a:r>
+          </a:p>
+          <a:p>
+            <a:r>
+              <a:rPr lang="en-US" altLang="zh-CN"/>
+              <a:t>;</a:t>
+            </a:r>
+          </a:p>
+        </p:txBody>
+      </p:sp>
+      <p:sp>
+        <p:nvSpPr>
+          <p:cNvPr id="33" name="文本框 32">
+            <a:extLst>
+              <a:ext uri="{FF2B5EF4-FFF2-40B4-BE49-F238E27FC236}">
+                <a16:creationId xmlns:a16="http://schemas.microsoft.com/office/drawing/2014/main" id="{7C0CEC16-93BC-C003-4A9D-8D86C07E674D}"/>
+              </a:ext>
+            </a:extLst>
+          </p:cNvPr>
+          <p:cNvSpPr txBox="1"/>
+          <p:nvPr/>
+        </p:nvSpPr>
+        <p:spPr>
+          <a:xfrm>
+            <a:off x="6371074" y="2432759"/>
+            <a:ext cx="1546597" cy="523220"/>
+          </a:xfrm>
+          <a:prstGeom prst="rect">
+            <a:avLst/>
+          </a:prstGeom>
+          <a:noFill/>
+          <a:ln>
+            <a:solidFill>
+              <a:schemeClr val="bg1">
+                <a:lumMod val="85000"/>
+              </a:schemeClr>
+            </a:solidFill>
+          </a:ln>
+        </p:spPr>
+        <p:txBody>
+          <a:bodyPr wrap="square">
+            <a:spAutoFit/>
+          </a:bodyPr>
+          <a:lstStyle>
+            <a:defPPr>
+              <a:defRPr lang="en-US"/>
+            </a:defPPr>
+            <a:lvl1pPr marR="0">
+              <a:buNone/>
+              <a:defRPr sz="700">
+                <a:solidFill>
+                  <a:srgbClr val="000000"/>
+                </a:solidFill>
+                <a:effectLst/>
+                <a:latin typeface="Consolas" panose="020B0609020204030204" pitchFamily="49" charset="0"/>
+              </a:defRPr>
+            </a:lvl1pPr>
+            <a:lvl2pPr lvl="1">
+              <a:defRPr sz="700"/>
+            </a:lvl2pPr>
+          </a:lstStyle>
+          <a:p>
+            <a:r>
+              <a:rPr lang="en-US" altLang="zh-CN"/>
+              <a:t>OccurrenceUsageElement:</a:t>
+            </a:r>
+          </a:p>
+          <a:p>
+            <a:pPr lvl="1"/>
+            <a:r>
+              <a:rPr lang="en-US" altLang="zh-CN">
+                <a:highlight>
+                  <a:srgbClr val="FFFF00"/>
+                </a:highlight>
+              </a:rPr>
+              <a:t>StructureUsageElement</a:t>
+            </a:r>
+            <a:r>
+              <a:rPr lang="en-US" altLang="zh-CN"/>
+              <a:t> </a:t>
+            </a:r>
+          </a:p>
+          <a:p>
+            <a:pPr lvl="1"/>
+            <a:r>
+              <a:rPr lang="en-US" altLang="zh-CN"/>
+              <a:t>| BehaviorUsageElement</a:t>
+            </a:r>
+          </a:p>
+          <a:p>
+            <a:r>
+              <a:rPr lang="en-US" altLang="zh-CN"/>
+              <a:t>;</a:t>
+            </a:r>
+          </a:p>
+        </p:txBody>
+      </p:sp>
+      <p:sp>
+        <p:nvSpPr>
+          <p:cNvPr id="35" name="文本框 34">
+            <a:extLst>
+              <a:ext uri="{FF2B5EF4-FFF2-40B4-BE49-F238E27FC236}">
+                <a16:creationId xmlns:a16="http://schemas.microsoft.com/office/drawing/2014/main" id="{4C9ABF47-1BF1-1DC0-A965-8E13F207A024}"/>
+              </a:ext>
+            </a:extLst>
+          </p:cNvPr>
+          <p:cNvSpPr txBox="1"/>
+          <p:nvPr/>
+        </p:nvSpPr>
+        <p:spPr>
+          <a:xfrm>
+            <a:off x="7988752" y="1376608"/>
+            <a:ext cx="1746830" cy="1661993"/>
+          </a:xfrm>
+          <a:prstGeom prst="rect">
+            <a:avLst/>
+          </a:prstGeom>
+          <a:noFill/>
+          <a:ln>
+            <a:solidFill>
+              <a:schemeClr val="bg1">
+                <a:lumMod val="85000"/>
+              </a:schemeClr>
+            </a:solidFill>
+          </a:ln>
+        </p:spPr>
+        <p:txBody>
+          <a:bodyPr wrap="square">
+            <a:spAutoFit/>
+          </a:bodyPr>
+          <a:lstStyle/>
+          <a:p>
+            <a:pPr marL="0" marR="0">
+              <a:buNone/>
+            </a:pPr>
+            <a:r>
+              <a:rPr lang="en-US" altLang="zh-CN" sz="600">
+                <a:solidFill>
+                  <a:srgbClr val="000000"/>
+                </a:solidFill>
+                <a:effectLst/>
+                <a:latin typeface="Consolas" panose="020B0609020204030204" pitchFamily="49" charset="0"/>
+              </a:rPr>
+              <a:t>StructureUsageElement:</a:t>
+            </a:r>
+          </a:p>
+          <a:p>
+            <a:pPr marL="0" marR="0">
+              <a:buNone/>
+            </a:pPr>
+            <a:r>
+              <a:rPr lang="en-US" altLang="zh-CN" sz="600">
+                <a:solidFill>
+                  <a:srgbClr val="3F7F5F"/>
+                </a:solidFill>
+                <a:effectLst/>
+                <a:latin typeface="Consolas" panose="020B0609020204030204" pitchFamily="49" charset="0"/>
+              </a:rPr>
+              <a:t>// OccurrenceUsage</a:t>
+            </a:r>
+            <a:endParaRPr lang="en-US" altLang="zh-CN" sz="600">
+              <a:solidFill>
+                <a:srgbClr val="000000"/>
+              </a:solidFill>
+              <a:effectLst/>
+              <a:latin typeface="Consolas" panose="020B0609020204030204" pitchFamily="49" charset="0"/>
+            </a:endParaRPr>
+          </a:p>
+          <a:p>
+            <a:pPr marL="0" marR="0">
+              <a:buNone/>
+            </a:pPr>
+            <a:r>
+              <a:rPr lang="en-US" altLang="zh-CN" sz="600">
+                <a:solidFill>
+                  <a:srgbClr val="3F7F5F"/>
+                </a:solidFill>
+                <a:effectLst/>
+                <a:latin typeface="Consolas" panose="020B0609020204030204" pitchFamily="49" charset="0"/>
+              </a:rPr>
+              <a:t>// | IndividualUsage</a:t>
+            </a:r>
+            <a:endParaRPr lang="en-US" altLang="zh-CN" sz="600">
+              <a:solidFill>
+                <a:srgbClr val="000000"/>
+              </a:solidFill>
+              <a:effectLst/>
+              <a:latin typeface="Consolas" panose="020B0609020204030204" pitchFamily="49" charset="0"/>
+            </a:endParaRPr>
+          </a:p>
+          <a:p>
+            <a:pPr marL="0" marR="0">
+              <a:buNone/>
+            </a:pPr>
+            <a:r>
+              <a:rPr lang="en-US" altLang="zh-CN" sz="600">
+                <a:solidFill>
+                  <a:srgbClr val="3F7F5F"/>
+                </a:solidFill>
+                <a:effectLst/>
+                <a:latin typeface="Consolas" panose="020B0609020204030204" pitchFamily="49" charset="0"/>
+              </a:rPr>
+              <a:t>// | PortionUsage</a:t>
+            </a:r>
+            <a:endParaRPr lang="en-US" altLang="zh-CN" sz="600">
+              <a:solidFill>
+                <a:srgbClr val="000000"/>
+              </a:solidFill>
+              <a:effectLst/>
+              <a:latin typeface="Consolas" panose="020B0609020204030204" pitchFamily="49" charset="0"/>
+            </a:endParaRPr>
+          </a:p>
+          <a:p>
+            <a:pPr marL="0" marR="0">
+              <a:buNone/>
+            </a:pPr>
+            <a:r>
+              <a:rPr lang="en-US" altLang="zh-CN" sz="600">
+                <a:solidFill>
+                  <a:srgbClr val="3F7F5F"/>
+                </a:solidFill>
+                <a:effectLst/>
+                <a:latin typeface="Consolas" panose="020B0609020204030204" pitchFamily="49" charset="0"/>
+              </a:rPr>
+              <a:t>// | EventOccurrenceUsage</a:t>
+            </a:r>
+            <a:endParaRPr lang="en-US" altLang="zh-CN" sz="600">
+              <a:solidFill>
+                <a:srgbClr val="000000"/>
+              </a:solidFill>
+              <a:effectLst/>
+              <a:latin typeface="Consolas" panose="020B0609020204030204" pitchFamily="49" charset="0"/>
+            </a:endParaRPr>
+          </a:p>
+          <a:p>
+            <a:pPr marL="0" marR="0">
+              <a:buNone/>
+            </a:pPr>
+            <a:r>
+              <a:rPr lang="en-US" altLang="zh-CN" sz="600">
+                <a:solidFill>
+                  <a:srgbClr val="000000"/>
+                </a:solidFill>
+                <a:effectLst/>
+                <a:latin typeface="Consolas" panose="020B0609020204030204" pitchFamily="49" charset="0"/>
+              </a:rPr>
+              <a:t>ItemUsage</a:t>
+            </a:r>
+          </a:p>
+          <a:p>
+            <a:pPr marL="0" marR="0">
+              <a:buNone/>
+            </a:pPr>
+            <a:r>
+              <a:rPr lang="en-US" altLang="zh-CN" sz="600">
+                <a:solidFill>
+                  <a:srgbClr val="000000"/>
+                </a:solidFill>
+                <a:effectLst/>
+                <a:latin typeface="Consolas" panose="020B0609020204030204" pitchFamily="49" charset="0"/>
+              </a:rPr>
+              <a:t>| </a:t>
+            </a:r>
+            <a:r>
+              <a:rPr lang="en-US" altLang="zh-CN" sz="600">
+                <a:solidFill>
+                  <a:srgbClr val="000000"/>
+                </a:solidFill>
+                <a:effectLst/>
+                <a:highlight>
+                  <a:srgbClr val="FFFF00"/>
+                </a:highlight>
+                <a:latin typeface="Consolas" panose="020B0609020204030204" pitchFamily="49" charset="0"/>
+              </a:rPr>
+              <a:t>PartUsage</a:t>
+            </a:r>
+          </a:p>
+          <a:p>
+            <a:pPr marL="0" marR="0">
+              <a:buNone/>
+            </a:pPr>
+            <a:r>
+              <a:rPr lang="en-US" altLang="zh-CN" sz="600">
+                <a:solidFill>
+                  <a:srgbClr val="3F7F5F"/>
+                </a:solidFill>
+                <a:effectLst/>
+                <a:latin typeface="Consolas" panose="020B0609020204030204" pitchFamily="49" charset="0"/>
+              </a:rPr>
+              <a:t>// | ViewUsage</a:t>
+            </a:r>
+            <a:endParaRPr lang="en-US" altLang="zh-CN" sz="600">
+              <a:solidFill>
+                <a:srgbClr val="000000"/>
+              </a:solidFill>
+              <a:effectLst/>
+              <a:latin typeface="Consolas" panose="020B0609020204030204" pitchFamily="49" charset="0"/>
+            </a:endParaRPr>
+          </a:p>
+          <a:p>
+            <a:pPr marL="0" marR="0">
+              <a:buNone/>
+            </a:pPr>
+            <a:r>
+              <a:rPr lang="en-US" altLang="zh-CN" sz="600">
+                <a:solidFill>
+                  <a:srgbClr val="3F7F5F"/>
+                </a:solidFill>
+                <a:effectLst/>
+                <a:latin typeface="Consolas" panose="020B0609020204030204" pitchFamily="49" charset="0"/>
+              </a:rPr>
+              <a:t>// | RenderingUsage</a:t>
+            </a:r>
+            <a:endParaRPr lang="en-US" altLang="zh-CN" sz="600">
+              <a:solidFill>
+                <a:srgbClr val="000000"/>
+              </a:solidFill>
+              <a:effectLst/>
+              <a:latin typeface="Consolas" panose="020B0609020204030204" pitchFamily="49" charset="0"/>
+            </a:endParaRPr>
+          </a:p>
+          <a:p>
+            <a:pPr marL="0" marR="0">
+              <a:buNone/>
+            </a:pPr>
+            <a:r>
+              <a:rPr lang="en-US" altLang="zh-CN" sz="600">
+                <a:solidFill>
+                  <a:srgbClr val="000000"/>
+                </a:solidFill>
+                <a:effectLst/>
+                <a:latin typeface="Consolas" panose="020B0609020204030204" pitchFamily="49" charset="0"/>
+              </a:rPr>
+              <a:t>| PortUsage</a:t>
+            </a:r>
+          </a:p>
+          <a:p>
+            <a:pPr marL="0" marR="0">
+              <a:buNone/>
+            </a:pPr>
+            <a:r>
+              <a:rPr lang="en-US" altLang="zh-CN" sz="600">
+                <a:solidFill>
+                  <a:srgbClr val="000000"/>
+                </a:solidFill>
+                <a:effectLst/>
+                <a:latin typeface="Consolas" panose="020B0609020204030204" pitchFamily="49" charset="0"/>
+              </a:rPr>
+              <a:t>| ConnectionUsage</a:t>
+            </a:r>
+          </a:p>
+          <a:p>
+            <a:pPr marL="0" marR="0">
+              <a:buNone/>
+            </a:pPr>
+            <a:r>
+              <a:rPr lang="en-US" altLang="zh-CN" sz="600">
+                <a:solidFill>
+                  <a:srgbClr val="000000"/>
+                </a:solidFill>
+                <a:effectLst/>
+                <a:latin typeface="Consolas" panose="020B0609020204030204" pitchFamily="49" charset="0"/>
+              </a:rPr>
+              <a:t>| InterfaceUsage</a:t>
+            </a:r>
+          </a:p>
+          <a:p>
+            <a:pPr marL="0" marR="0">
+              <a:buNone/>
+            </a:pPr>
+            <a:r>
+              <a:rPr lang="en-US" altLang="zh-CN" sz="600">
+                <a:solidFill>
+                  <a:srgbClr val="3F7F5F"/>
+                </a:solidFill>
+                <a:effectLst/>
+                <a:latin typeface="Consolas" panose="020B0609020204030204" pitchFamily="49" charset="0"/>
+              </a:rPr>
+              <a:t>// | AllocationUsage</a:t>
+            </a:r>
+            <a:endParaRPr lang="en-US" altLang="zh-CN" sz="600">
+              <a:solidFill>
+                <a:srgbClr val="000000"/>
+              </a:solidFill>
+              <a:effectLst/>
+              <a:latin typeface="Consolas" panose="020B0609020204030204" pitchFamily="49" charset="0"/>
+            </a:endParaRPr>
+          </a:p>
+          <a:p>
+            <a:pPr marL="0" marR="0">
+              <a:buNone/>
+            </a:pPr>
+            <a:r>
+              <a:rPr lang="en-US" altLang="zh-CN" sz="600">
+                <a:solidFill>
+                  <a:srgbClr val="3F7F5F"/>
+                </a:solidFill>
+                <a:effectLst/>
+                <a:latin typeface="Consolas" panose="020B0609020204030204" pitchFamily="49" charset="0"/>
+              </a:rPr>
+              <a:t>// | Message</a:t>
+            </a:r>
+            <a:endParaRPr lang="en-US" altLang="zh-CN" sz="600">
+              <a:solidFill>
+                <a:srgbClr val="000000"/>
+              </a:solidFill>
+              <a:effectLst/>
+              <a:latin typeface="Consolas" panose="020B0609020204030204" pitchFamily="49" charset="0"/>
+            </a:endParaRPr>
+          </a:p>
+          <a:p>
+            <a:pPr marL="0" marR="0">
+              <a:buNone/>
+            </a:pPr>
+            <a:r>
+              <a:rPr lang="en-US" altLang="zh-CN" sz="600">
+                <a:solidFill>
+                  <a:srgbClr val="000000"/>
+                </a:solidFill>
+                <a:effectLst/>
+                <a:latin typeface="Consolas" panose="020B0609020204030204" pitchFamily="49" charset="0"/>
+              </a:rPr>
+              <a:t>| FlowConnectionUsage</a:t>
+            </a:r>
+          </a:p>
+          <a:p>
+            <a:pPr marL="0" marR="0">
+              <a:buNone/>
+            </a:pPr>
+            <a:r>
+              <a:rPr lang="en-US" altLang="zh-CN" sz="600">
+                <a:solidFill>
+                  <a:srgbClr val="000000"/>
+                </a:solidFill>
+                <a:effectLst/>
+                <a:latin typeface="Consolas" panose="020B0609020204030204" pitchFamily="49" charset="0"/>
+              </a:rPr>
+              <a:t>| SuccessionFlowConnectionUsage</a:t>
+            </a:r>
+          </a:p>
+          <a:p>
+            <a:pPr marL="0" marR="0">
+              <a:buNone/>
+            </a:pPr>
+            <a:r>
+              <a:rPr lang="en-US" altLang="zh-CN" sz="600">
+                <a:solidFill>
+                  <a:srgbClr val="000000"/>
+                </a:solidFill>
+                <a:effectLst/>
+                <a:latin typeface="Consolas" panose="020B0609020204030204" pitchFamily="49" charset="0"/>
+              </a:rPr>
+              <a:t>;</a:t>
+            </a:r>
+          </a:p>
+        </p:txBody>
+      </p:sp>
+      <p:sp>
+        <p:nvSpPr>
+          <p:cNvPr id="37" name="文本框 36">
+            <a:extLst>
+              <a:ext uri="{FF2B5EF4-FFF2-40B4-BE49-F238E27FC236}">
+                <a16:creationId xmlns:a16="http://schemas.microsoft.com/office/drawing/2014/main" id="{E806F628-D79B-54B3-3442-4722B2492E05}"/>
+              </a:ext>
+            </a:extLst>
+          </p:cNvPr>
+          <p:cNvSpPr txBox="1"/>
+          <p:nvPr/>
+        </p:nvSpPr>
+        <p:spPr>
+          <a:xfrm>
+            <a:off x="4695585" y="3086892"/>
+            <a:ext cx="4847126" cy="861774"/>
+          </a:xfrm>
+          <a:prstGeom prst="rect">
+            <a:avLst/>
+          </a:prstGeom>
+          <a:noFill/>
+          <a:ln>
+            <a:solidFill>
+              <a:schemeClr val="accent6"/>
+            </a:solidFill>
+          </a:ln>
+        </p:spPr>
+        <p:txBody>
+          <a:bodyPr wrap="square">
+            <a:spAutoFit/>
+          </a:bodyPr>
+          <a:lstStyle/>
+          <a:p>
+            <a:pPr marL="0" marR="0">
+              <a:buNone/>
+            </a:pPr>
+            <a:r>
+              <a:rPr lang="en-US" altLang="zh-CN" sz="1000">
+                <a:solidFill>
+                  <a:srgbClr val="000000"/>
+                </a:solidFill>
+                <a:effectLst/>
+                <a:latin typeface="Consolas" panose="020B0609020204030204" pitchFamily="49" charset="0"/>
+              </a:rPr>
+              <a:t>PartUsage:</a:t>
+            </a:r>
+          </a:p>
+          <a:p>
+            <a:pPr lvl="1"/>
+            <a:r>
+              <a:rPr lang="en-US" altLang="zh-CN" sz="1000">
+                <a:solidFill>
+                  <a:srgbClr val="000000"/>
+                </a:solidFill>
+                <a:effectLst/>
+                <a:latin typeface="Consolas" panose="020B0609020204030204" pitchFamily="49" charset="0"/>
+              </a:rPr>
+              <a:t>EmptySuccessionPrefix</a:t>
+            </a:r>
+          </a:p>
+          <a:p>
+            <a:pPr lvl="1"/>
+            <a:r>
+              <a:rPr lang="en-US" altLang="zh-CN" sz="1000">
+                <a:solidFill>
+                  <a:srgbClr val="000000"/>
+                </a:solidFill>
+                <a:effectLst/>
+                <a:latin typeface="Consolas" panose="020B0609020204030204" pitchFamily="49" charset="0"/>
+              </a:rPr>
+              <a:t>MemberPrefix OccurrenceUsagePrefix </a:t>
+            </a:r>
+            <a:r>
+              <a:rPr lang="en-US" altLang="zh-CN" sz="1000">
+                <a:solidFill>
+                  <a:srgbClr val="2A00FF"/>
+                </a:solidFill>
+                <a:effectLst/>
+                <a:latin typeface="Consolas" panose="020B0609020204030204" pitchFamily="49" charset="0"/>
+              </a:rPr>
+              <a:t>'part'</a:t>
+            </a:r>
+            <a:r>
+              <a:rPr lang="en-US" altLang="zh-CN" sz="1000">
+                <a:solidFill>
+                  <a:srgbClr val="000000"/>
+                </a:solidFill>
+                <a:effectLst/>
+                <a:latin typeface="Consolas" panose="020B0609020204030204" pitchFamily="49" charset="0"/>
+              </a:rPr>
+              <a:t> Usage </a:t>
+            </a:r>
+          </a:p>
+          <a:p>
+            <a:pPr lvl="1"/>
+            <a:r>
+              <a:rPr lang="en-US" altLang="zh-CN" sz="1000">
+                <a:solidFill>
+                  <a:srgbClr val="000000"/>
+                </a:solidFill>
+                <a:effectLst/>
+                <a:latin typeface="Consolas" panose="020B0609020204030204" pitchFamily="49" charset="0"/>
+              </a:rPr>
+              <a:t>(</a:t>
+            </a:r>
+            <a:r>
+              <a:rPr lang="en-US" altLang="zh-CN" sz="1000">
+                <a:solidFill>
+                  <a:srgbClr val="2A00FF"/>
+                </a:solidFill>
+                <a:effectLst/>
+                <a:latin typeface="Consolas" panose="020B0609020204030204" pitchFamily="49" charset="0"/>
+              </a:rPr>
+              <a:t>';'</a:t>
+            </a:r>
+            <a:r>
+              <a:rPr lang="en-US" altLang="zh-CN" sz="1000">
+                <a:solidFill>
+                  <a:srgbClr val="000000"/>
+                </a:solidFill>
+                <a:effectLst/>
+                <a:latin typeface="Consolas" panose="020B0609020204030204" pitchFamily="49" charset="0"/>
+              </a:rPr>
+              <a:t> | </a:t>
+            </a:r>
+            <a:r>
+              <a:rPr lang="en-US" altLang="zh-CN" sz="1000">
+                <a:solidFill>
+                  <a:srgbClr val="2A00FF"/>
+                </a:solidFill>
+                <a:effectLst/>
+                <a:latin typeface="Consolas" panose="020B0609020204030204" pitchFamily="49" charset="0"/>
+              </a:rPr>
+              <a:t>'{'</a:t>
+            </a:r>
+            <a:r>
+              <a:rPr lang="en-US" altLang="zh-CN" sz="1000">
+                <a:solidFill>
+                  <a:srgbClr val="000000"/>
+                </a:solidFill>
+                <a:effectLst/>
+                <a:latin typeface="Consolas" panose="020B0609020204030204" pitchFamily="49" charset="0"/>
+              </a:rPr>
+              <a:t> (elements+=UsageBodyElement)* </a:t>
+            </a:r>
+            <a:r>
+              <a:rPr lang="en-US" altLang="zh-CN" sz="1000">
+                <a:solidFill>
+                  <a:srgbClr val="2A00FF"/>
+                </a:solidFill>
+                <a:effectLst/>
+                <a:latin typeface="Consolas" panose="020B0609020204030204" pitchFamily="49" charset="0"/>
+              </a:rPr>
+              <a:t>'}'</a:t>
+            </a:r>
+            <a:r>
+              <a:rPr lang="en-US" altLang="zh-CN" sz="1000">
+                <a:solidFill>
+                  <a:srgbClr val="000000"/>
+                </a:solidFill>
+                <a:effectLst/>
+                <a:latin typeface="Consolas" panose="020B0609020204030204" pitchFamily="49" charset="0"/>
+              </a:rPr>
+              <a:t>)</a:t>
+            </a:r>
+          </a:p>
+          <a:p>
+            <a:pPr marL="0" marR="0">
+              <a:buNone/>
+            </a:pPr>
+            <a:r>
+              <a:rPr lang="en-US" altLang="zh-CN" sz="1000">
+                <a:solidFill>
+                  <a:srgbClr val="000000"/>
+                </a:solidFill>
+                <a:effectLst/>
+                <a:latin typeface="Consolas" panose="020B0609020204030204" pitchFamily="49" charset="0"/>
+              </a:rPr>
+              <a:t>;</a:t>
+            </a:r>
+          </a:p>
+        </p:txBody>
+      </p:sp>
+      <p:sp>
+        <p:nvSpPr>
+          <p:cNvPr id="42" name="矩形 41">
+            <a:extLst>
+              <a:ext uri="{FF2B5EF4-FFF2-40B4-BE49-F238E27FC236}">
+                <a16:creationId xmlns:a16="http://schemas.microsoft.com/office/drawing/2014/main" id="{578124CE-883C-3D56-66D9-37447A4970EA}"/>
+              </a:ext>
+            </a:extLst>
+          </p:cNvPr>
+          <p:cNvSpPr/>
+          <p:nvPr/>
+        </p:nvSpPr>
+        <p:spPr>
+          <a:xfrm>
+            <a:off x="5186942" y="3275113"/>
+            <a:ext cx="1585924" cy="153887"/>
+          </a:xfrm>
+          <a:prstGeom prst="rect">
+            <a:avLst/>
+          </a:prstGeom>
+          <a:noFill/>
+          <a:ln>
+            <a:solidFill>
+              <a:srgbClr val="EB3857"/>
+            </a:solidFill>
+          </a:ln>
+        </p:spPr>
+        <p:style>
+          <a:lnRef idx="2">
+            <a:schemeClr val="accent1">
+              <a:shade val="15000"/>
+            </a:schemeClr>
+          </a:lnRef>
+          <a:fillRef idx="1">
+            <a:schemeClr val="accent1"/>
+          </a:fillRef>
+          <a:effectRef idx="0">
+            <a:schemeClr val="accent1"/>
+          </a:effectRef>
+          <a:fontRef idx="minor">
+            <a:schemeClr val="lt1"/>
+          </a:fontRef>
+        </p:style>
+        <p:txBody>
+          <a:bodyPr rtlCol="0" anchor="ctr"/>
+          <a:lstStyle/>
+          <a:p>
+            <a:pPr algn="ctr"/>
+            <a:endParaRPr lang="zh-CN" altLang="en-US"/>
+          </a:p>
+        </p:txBody>
+      </p:sp>
+      <p:sp>
+        <p:nvSpPr>
+          <p:cNvPr id="45" name="矩形 44">
+            <a:extLst>
+              <a:ext uri="{FF2B5EF4-FFF2-40B4-BE49-F238E27FC236}">
+                <a16:creationId xmlns:a16="http://schemas.microsoft.com/office/drawing/2014/main" id="{5E3D0B66-D364-C735-5457-8E368EE7CBEB}"/>
+              </a:ext>
+            </a:extLst>
+          </p:cNvPr>
+          <p:cNvSpPr/>
+          <p:nvPr/>
+        </p:nvSpPr>
+        <p:spPr>
+          <a:xfrm>
+            <a:off x="5174330" y="3275113"/>
+            <a:ext cx="1585924" cy="153887"/>
+          </a:xfrm>
+          <a:prstGeom prst="rect">
+            <a:avLst/>
+          </a:prstGeom>
+          <a:noFill/>
+          <a:ln>
+            <a:solidFill>
+              <a:srgbClr val="EB3857"/>
+            </a:solidFill>
+          </a:ln>
+        </p:spPr>
+        <p:style>
+          <a:lnRef idx="2">
+            <a:schemeClr val="accent1">
+              <a:shade val="15000"/>
+            </a:schemeClr>
+          </a:lnRef>
+          <a:fillRef idx="1">
+            <a:schemeClr val="accent1"/>
+          </a:fillRef>
+          <a:effectRef idx="0">
+            <a:schemeClr val="accent1"/>
+          </a:effectRef>
+          <a:fontRef idx="minor">
+            <a:schemeClr val="lt1"/>
+          </a:fontRef>
+        </p:style>
+        <p:txBody>
+          <a:bodyPr rtlCol="0" anchor="ctr"/>
+          <a:lstStyle/>
+          <a:p>
+            <a:pPr algn="ctr"/>
+            <a:endParaRPr lang="zh-CN" altLang="en-US"/>
+          </a:p>
+        </p:txBody>
+      </p:sp>
+      <p:sp>
+        <p:nvSpPr>
+          <p:cNvPr id="46" name="矩形 45">
+            <a:extLst>
+              <a:ext uri="{FF2B5EF4-FFF2-40B4-BE49-F238E27FC236}">
+                <a16:creationId xmlns:a16="http://schemas.microsoft.com/office/drawing/2014/main" id="{6A8F5187-41EA-DFC8-6441-CD292F51CE74}"/>
+              </a:ext>
+            </a:extLst>
+          </p:cNvPr>
+          <p:cNvSpPr/>
+          <p:nvPr/>
+        </p:nvSpPr>
+        <p:spPr>
+          <a:xfrm>
+            <a:off x="5174330" y="3427423"/>
+            <a:ext cx="961609" cy="153887"/>
+          </a:xfrm>
+          <a:prstGeom prst="rect">
+            <a:avLst/>
+          </a:prstGeom>
+          <a:noFill/>
+          <a:ln>
+            <a:solidFill>
+              <a:srgbClr val="EB3857"/>
+            </a:solidFill>
+          </a:ln>
+        </p:spPr>
+        <p:style>
+          <a:lnRef idx="2">
+            <a:schemeClr val="accent1">
+              <a:shade val="15000"/>
+            </a:schemeClr>
+          </a:lnRef>
+          <a:fillRef idx="1">
+            <a:schemeClr val="accent1"/>
+          </a:fillRef>
+          <a:effectRef idx="0">
+            <a:schemeClr val="accent1"/>
+          </a:effectRef>
+          <a:fontRef idx="minor">
+            <a:schemeClr val="lt1"/>
+          </a:fontRef>
+        </p:style>
+        <p:txBody>
+          <a:bodyPr rtlCol="0" anchor="ctr"/>
+          <a:lstStyle/>
+          <a:p>
+            <a:pPr algn="ctr"/>
+            <a:endParaRPr lang="zh-CN" altLang="en-US"/>
+          </a:p>
+        </p:txBody>
+      </p:sp>
+      <p:sp>
+        <p:nvSpPr>
+          <p:cNvPr id="47" name="矩形 46">
+            <a:extLst>
+              <a:ext uri="{FF2B5EF4-FFF2-40B4-BE49-F238E27FC236}">
+                <a16:creationId xmlns:a16="http://schemas.microsoft.com/office/drawing/2014/main" id="{BC29A9EF-960B-2AE9-AB9E-174B2501237A}"/>
+              </a:ext>
+            </a:extLst>
+          </p:cNvPr>
+          <p:cNvSpPr/>
+          <p:nvPr/>
+        </p:nvSpPr>
+        <p:spPr>
+          <a:xfrm>
+            <a:off x="6135939" y="3434954"/>
+            <a:ext cx="1528162" cy="153887"/>
+          </a:xfrm>
+          <a:prstGeom prst="rect">
+            <a:avLst/>
+          </a:prstGeom>
+          <a:noFill/>
+          <a:ln>
+            <a:solidFill>
+              <a:srgbClr val="EB3857"/>
+            </a:solidFill>
+          </a:ln>
+        </p:spPr>
+        <p:style>
+          <a:lnRef idx="2">
+            <a:schemeClr val="accent1">
+              <a:shade val="15000"/>
+            </a:schemeClr>
+          </a:lnRef>
+          <a:fillRef idx="1">
+            <a:schemeClr val="accent1"/>
+          </a:fillRef>
+          <a:effectRef idx="0">
+            <a:schemeClr val="accent1"/>
+          </a:effectRef>
+          <a:fontRef idx="minor">
+            <a:schemeClr val="lt1"/>
+          </a:fontRef>
+        </p:style>
+        <p:txBody>
+          <a:bodyPr rtlCol="0" anchor="ctr"/>
+          <a:lstStyle/>
+          <a:p>
+            <a:pPr algn="ctr"/>
+            <a:endParaRPr lang="zh-CN" altLang="en-US"/>
+          </a:p>
+        </p:txBody>
+      </p:sp>
+      <p:sp>
+        <p:nvSpPr>
+          <p:cNvPr id="48" name="矩形 47">
+            <a:extLst>
+              <a:ext uri="{FF2B5EF4-FFF2-40B4-BE49-F238E27FC236}">
+                <a16:creationId xmlns:a16="http://schemas.microsoft.com/office/drawing/2014/main" id="{4C184A17-2A2A-F5B1-8FC7-74DFE157ABC6}"/>
+              </a:ext>
+            </a:extLst>
+          </p:cNvPr>
+          <p:cNvSpPr/>
+          <p:nvPr/>
+        </p:nvSpPr>
+        <p:spPr>
+          <a:xfrm>
+            <a:off x="8147618" y="3434954"/>
+            <a:ext cx="455787" cy="153887"/>
+          </a:xfrm>
+          <a:prstGeom prst="rect">
+            <a:avLst/>
+          </a:prstGeom>
+          <a:noFill/>
+          <a:ln>
+            <a:solidFill>
+              <a:srgbClr val="EB3857"/>
+            </a:solidFill>
+          </a:ln>
+        </p:spPr>
+        <p:style>
+          <a:lnRef idx="2">
+            <a:schemeClr val="accent1">
+              <a:shade val="15000"/>
+            </a:schemeClr>
+          </a:lnRef>
+          <a:fillRef idx="1">
+            <a:schemeClr val="accent1"/>
+          </a:fillRef>
+          <a:effectRef idx="0">
+            <a:schemeClr val="accent1"/>
+          </a:effectRef>
+          <a:fontRef idx="minor">
+            <a:schemeClr val="lt1"/>
+          </a:fontRef>
+        </p:style>
+        <p:txBody>
+          <a:bodyPr rtlCol="0" anchor="ctr"/>
+          <a:lstStyle/>
+          <a:p>
+            <a:pPr algn="ctr"/>
+            <a:endParaRPr lang="zh-CN" altLang="en-US"/>
+          </a:p>
+        </p:txBody>
+      </p:sp>
+      <p:cxnSp>
+        <p:nvCxnSpPr>
+          <p:cNvPr id="50" name="连接符: 肘形 49">
+            <a:extLst>
+              <a:ext uri="{FF2B5EF4-FFF2-40B4-BE49-F238E27FC236}">
+                <a16:creationId xmlns:a16="http://schemas.microsoft.com/office/drawing/2014/main" id="{FEAE831B-82CC-2CC7-72B1-2769C8B8023D}"/>
+              </a:ext>
+            </a:extLst>
+          </p:cNvPr>
+          <p:cNvCxnSpPr>
+            <a:stCxn id="12" idx="3"/>
+            <a:endCxn id="46" idx="2"/>
+          </p:cNvCxnSpPr>
+          <p:nvPr/>
+        </p:nvCxnSpPr>
+        <p:spPr>
+          <a:xfrm flipV="1">
+            <a:off x="4439570" y="3581310"/>
+            <a:ext cx="1215565" cy="421149"/>
+          </a:xfrm>
+          <a:prstGeom prst="bentConnector2">
+            <a:avLst/>
+          </a:prstGeom>
+          <a:ln w="12700">
+            <a:solidFill>
+              <a:srgbClr val="EB3857"/>
+            </a:solidFill>
+            <a:tailEnd type="triangle"/>
+          </a:ln>
+        </p:spPr>
+        <p:style>
+          <a:lnRef idx="1">
+            <a:schemeClr val="accent1"/>
+          </a:lnRef>
+          <a:fillRef idx="0">
+            <a:schemeClr val="accent1"/>
+          </a:fillRef>
+          <a:effectRef idx="0">
+            <a:schemeClr val="accent1"/>
+          </a:effectRef>
+          <a:fontRef idx="minor">
+            <a:schemeClr val="tx1"/>
+          </a:fontRef>
+        </p:style>
+      </p:cxnSp>
+      <p:cxnSp>
+        <p:nvCxnSpPr>
+          <p:cNvPr id="52" name="连接符: 肘形 51">
+            <a:extLst>
+              <a:ext uri="{FF2B5EF4-FFF2-40B4-BE49-F238E27FC236}">
+                <a16:creationId xmlns:a16="http://schemas.microsoft.com/office/drawing/2014/main" id="{350D7904-8981-6BDD-EFD8-AEFC069F2AFC}"/>
+              </a:ext>
+            </a:extLst>
+          </p:cNvPr>
+          <p:cNvCxnSpPr>
+            <a:cxnSpLocks/>
+            <a:stCxn id="12" idx="3"/>
+            <a:endCxn id="47" idx="2"/>
+          </p:cNvCxnSpPr>
+          <p:nvPr/>
+        </p:nvCxnSpPr>
+        <p:spPr>
+          <a:xfrm flipV="1">
+            <a:off x="4439570" y="3588841"/>
+            <a:ext cx="2460450" cy="413618"/>
+          </a:xfrm>
+          <a:prstGeom prst="bentConnector2">
+            <a:avLst/>
+          </a:prstGeom>
+          <a:ln w="12700">
+            <a:solidFill>
+              <a:srgbClr val="EB3857"/>
+            </a:solidFill>
+            <a:tailEnd type="triangle"/>
+          </a:ln>
+        </p:spPr>
+        <p:style>
+          <a:lnRef idx="1">
+            <a:schemeClr val="accent1"/>
+          </a:lnRef>
+          <a:fillRef idx="0">
+            <a:schemeClr val="accent1"/>
+          </a:fillRef>
+          <a:effectRef idx="0">
+            <a:schemeClr val="accent1"/>
+          </a:effectRef>
+          <a:fontRef idx="minor">
+            <a:schemeClr val="tx1"/>
+          </a:fontRef>
+        </p:style>
+      </p:cxnSp>
+      <p:cxnSp>
+        <p:nvCxnSpPr>
+          <p:cNvPr id="55" name="连接符: 肘形 54">
+            <a:extLst>
+              <a:ext uri="{FF2B5EF4-FFF2-40B4-BE49-F238E27FC236}">
+                <a16:creationId xmlns:a16="http://schemas.microsoft.com/office/drawing/2014/main" id="{111B6FF7-EC67-E67F-AE2F-08CFFFC6B1F3}"/>
+              </a:ext>
+            </a:extLst>
+          </p:cNvPr>
+          <p:cNvCxnSpPr>
+            <a:cxnSpLocks/>
+            <a:stCxn id="12" idx="3"/>
+            <a:endCxn id="48" idx="2"/>
+          </p:cNvCxnSpPr>
+          <p:nvPr/>
+        </p:nvCxnSpPr>
+        <p:spPr>
+          <a:xfrm flipV="1">
+            <a:off x="4439570" y="3588841"/>
+            <a:ext cx="3935942" cy="413618"/>
+          </a:xfrm>
+          <a:prstGeom prst="bentConnector2">
+            <a:avLst/>
+          </a:prstGeom>
+          <a:ln w="12700">
+            <a:solidFill>
+              <a:srgbClr val="EB3857"/>
+            </a:solidFill>
+            <a:tailEnd type="triangle"/>
+          </a:ln>
+        </p:spPr>
+        <p:style>
+          <a:lnRef idx="1">
+            <a:schemeClr val="accent1"/>
+          </a:lnRef>
+          <a:fillRef idx="0">
+            <a:schemeClr val="accent1"/>
+          </a:fillRef>
+          <a:effectRef idx="0">
+            <a:schemeClr val="accent1"/>
+          </a:effectRef>
+          <a:fontRef idx="minor">
+            <a:schemeClr val="tx1"/>
+          </a:fontRef>
+        </p:style>
+      </p:cxnSp>
     </p:spTree>
     <p:extLst>
       <p:ext uri="{BB962C8B-B14F-4D97-AF65-F5344CB8AC3E}">

--- a/doc/Figure.pptx
+++ b/doc/Figure.pptx
@@ -5,10 +5,12 @@
     <p:sldMasterId id="2147483660" r:id="rId1"/>
   </p:sldMasterIdLst>
   <p:notesMasterIdLst>
-    <p:notesMasterId r:id="rId3"/>
+    <p:notesMasterId r:id="rId5"/>
   </p:notesMasterIdLst>
   <p:sldIdLst>
     <p:sldId id="272" r:id="rId2"/>
+    <p:sldId id="273" r:id="rId3"/>
+    <p:sldId id="274" r:id="rId4"/>
   </p:sldIdLst>
   <p:sldSz cx="9906000" cy="6858000" type="A4"/>
   <p:notesSz cx="6797675" cy="9929813"/>
@@ -629,7 +631,7 @@
           <a:p>
             <a:fld id="{2701BA64-2DB9-41C3-96A1-2E5F58465B70}" type="datetimeFigureOut">
               <a:rPr lang="zh-CN" altLang="en-US" smtClean="0"/>
-              <a:t>2025/11/28</a:t>
+              <a:t>2025/12/30</a:t>
             </a:fld>
             <a:endParaRPr lang="zh-CN" altLang="en-US"/>
           </a:p>
@@ -1027,7 +1029,7 @@
           <a:p>
             <a:fld id="{FA1F4D98-94C1-47F8-82C9-964CF0395BC0}" type="datetimeFigureOut">
               <a:rPr lang="zh-CN" altLang="en-US" smtClean="0"/>
-              <a:t>2025/11/28</a:t>
+              <a:t>2025/12/30</a:t>
             </a:fld>
             <a:endParaRPr lang="zh-CN" altLang="en-US"/>
           </a:p>
@@ -1197,7 +1199,7 @@
           <a:p>
             <a:fld id="{FA1F4D98-94C1-47F8-82C9-964CF0395BC0}" type="datetimeFigureOut">
               <a:rPr lang="zh-CN" altLang="en-US" smtClean="0"/>
-              <a:t>2025/11/28</a:t>
+              <a:t>2025/12/30</a:t>
             </a:fld>
             <a:endParaRPr lang="zh-CN" altLang="en-US"/>
           </a:p>
@@ -1377,7 +1379,7 @@
           <a:p>
             <a:fld id="{FA1F4D98-94C1-47F8-82C9-964CF0395BC0}" type="datetimeFigureOut">
               <a:rPr lang="zh-CN" altLang="en-US" smtClean="0"/>
-              <a:t>2025/11/28</a:t>
+              <a:t>2025/12/30</a:t>
             </a:fld>
             <a:endParaRPr lang="zh-CN" altLang="en-US"/>
           </a:p>
@@ -1547,7 +1549,7 @@
           <a:p>
             <a:fld id="{FA1F4D98-94C1-47F8-82C9-964CF0395BC0}" type="datetimeFigureOut">
               <a:rPr lang="zh-CN" altLang="en-US" smtClean="0"/>
-              <a:t>2025/11/28</a:t>
+              <a:t>2025/12/30</a:t>
             </a:fld>
             <a:endParaRPr lang="zh-CN" altLang="en-US"/>
           </a:p>
@@ -1791,7 +1793,7 @@
           <a:p>
             <a:fld id="{FA1F4D98-94C1-47F8-82C9-964CF0395BC0}" type="datetimeFigureOut">
               <a:rPr lang="zh-CN" altLang="en-US" smtClean="0"/>
-              <a:t>2025/11/28</a:t>
+              <a:t>2025/12/30</a:t>
             </a:fld>
             <a:endParaRPr lang="zh-CN" altLang="en-US"/>
           </a:p>
@@ -2023,7 +2025,7 @@
           <a:p>
             <a:fld id="{FA1F4D98-94C1-47F8-82C9-964CF0395BC0}" type="datetimeFigureOut">
               <a:rPr lang="zh-CN" altLang="en-US" smtClean="0"/>
-              <a:t>2025/11/28</a:t>
+              <a:t>2025/12/30</a:t>
             </a:fld>
             <a:endParaRPr lang="zh-CN" altLang="en-US"/>
           </a:p>
@@ -2390,7 +2392,7 @@
           <a:p>
             <a:fld id="{FA1F4D98-94C1-47F8-82C9-964CF0395BC0}" type="datetimeFigureOut">
               <a:rPr lang="zh-CN" altLang="en-US" smtClean="0"/>
-              <a:t>2025/11/28</a:t>
+              <a:t>2025/12/30</a:t>
             </a:fld>
             <a:endParaRPr lang="zh-CN" altLang="en-US"/>
           </a:p>
@@ -2508,7 +2510,7 @@
           <a:p>
             <a:fld id="{FA1F4D98-94C1-47F8-82C9-964CF0395BC0}" type="datetimeFigureOut">
               <a:rPr lang="zh-CN" altLang="en-US" smtClean="0"/>
-              <a:t>2025/11/28</a:t>
+              <a:t>2025/12/30</a:t>
             </a:fld>
             <a:endParaRPr lang="zh-CN" altLang="en-US"/>
           </a:p>
@@ -2603,7 +2605,7 @@
           <a:p>
             <a:fld id="{FA1F4D98-94C1-47F8-82C9-964CF0395BC0}" type="datetimeFigureOut">
               <a:rPr lang="zh-CN" altLang="en-US" smtClean="0"/>
-              <a:t>2025/11/28</a:t>
+              <a:t>2025/12/30</a:t>
             </a:fld>
             <a:endParaRPr lang="zh-CN" altLang="en-US"/>
           </a:p>
@@ -2880,7 +2882,7 @@
           <a:p>
             <a:fld id="{FA1F4D98-94C1-47F8-82C9-964CF0395BC0}" type="datetimeFigureOut">
               <a:rPr lang="zh-CN" altLang="en-US" smtClean="0"/>
-              <a:t>2025/11/28</a:t>
+              <a:t>2025/12/30</a:t>
             </a:fld>
             <a:endParaRPr lang="zh-CN" altLang="en-US"/>
           </a:p>
@@ -3137,7 +3139,7 @@
           <a:p>
             <a:fld id="{FA1F4D98-94C1-47F8-82C9-964CF0395BC0}" type="datetimeFigureOut">
               <a:rPr lang="zh-CN" altLang="en-US" smtClean="0"/>
-              <a:t>2025/11/28</a:t>
+              <a:t>2025/12/30</a:t>
             </a:fld>
             <a:endParaRPr lang="zh-CN" altLang="en-US"/>
           </a:p>
@@ -3350,7 +3352,7 @@
           <a:p>
             <a:fld id="{FA1F4D98-94C1-47F8-82C9-964CF0395BC0}" type="datetimeFigureOut">
               <a:rPr lang="zh-CN" altLang="en-US" smtClean="0"/>
-              <a:t>2025/11/28</a:t>
+              <a:t>2025/12/30</a:t>
             </a:fld>
             <a:endParaRPr lang="zh-CN" altLang="en-US"/>
           </a:p>
@@ -6110,6 +6112,2270 @@
     <p:extLst>
       <p:ext uri="{BB962C8B-B14F-4D97-AF65-F5344CB8AC3E}">
         <p14:creationId xmlns:p14="http://schemas.microsoft.com/office/powerpoint/2010/main" val="3624953035"/>
+      </p:ext>
+    </p:extLst>
+  </p:cSld>
+  <p:clrMapOvr>
+    <a:masterClrMapping/>
+  </p:clrMapOvr>
+</p:sld>
+</file>
+
+<file path=ppt/slides/slide2.xml><?xml version="1.0" encoding="utf-8"?>
+<p:sld xmlns:a="http://schemas.openxmlformats.org/drawingml/2006/main" xmlns:r="http://schemas.openxmlformats.org/officeDocument/2006/relationships" xmlns:p="http://schemas.openxmlformats.org/presentationml/2006/main">
+  <p:cSld>
+    <p:spTree>
+      <p:nvGrpSpPr>
+        <p:cNvPr id="1" name=""/>
+        <p:cNvGrpSpPr/>
+        <p:nvPr/>
+      </p:nvGrpSpPr>
+      <p:grpSpPr>
+        <a:xfrm>
+          <a:off x="0" y="0"/>
+          <a:ext cx="0" cy="0"/>
+          <a:chOff x="0" y="0"/>
+          <a:chExt cx="0" cy="0"/>
+        </a:xfrm>
+      </p:grpSpPr>
+      <p:sp>
+        <p:nvSpPr>
+          <p:cNvPr id="4" name="矩形 3">
+            <a:extLst>
+              <a:ext uri="{FF2B5EF4-FFF2-40B4-BE49-F238E27FC236}">
+                <a16:creationId xmlns:a16="http://schemas.microsoft.com/office/drawing/2014/main" id="{EC5F12E6-2C34-8358-BD0A-5BE87E860F8B}"/>
+              </a:ext>
+            </a:extLst>
+          </p:cNvPr>
+          <p:cNvSpPr/>
+          <p:nvPr/>
+        </p:nvSpPr>
+        <p:spPr>
+          <a:xfrm>
+            <a:off x="1472828" y="1098286"/>
+            <a:ext cx="1069733" cy="213901"/>
+          </a:xfrm>
+          <a:prstGeom prst="rect">
+            <a:avLst/>
+          </a:prstGeom>
+          <a:solidFill>
+            <a:schemeClr val="bg1"/>
+          </a:solidFill>
+          <a:ln w="19050">
+            <a:solidFill>
+              <a:srgbClr val="AEEC84"/>
+            </a:solidFill>
+          </a:ln>
+          <a:effectLst>
+            <a:outerShdw blurRad="50800" dist="38100" dir="2700000" algn="tl" rotWithShape="0">
+              <a:prstClr val="black">
+                <a:alpha val="40000"/>
+              </a:prstClr>
+            </a:outerShdw>
+          </a:effectLst>
+        </p:spPr>
+        <p:style>
+          <a:lnRef idx="2">
+            <a:schemeClr val="accent1">
+              <a:shade val="15000"/>
+            </a:schemeClr>
+          </a:lnRef>
+          <a:fillRef idx="1">
+            <a:schemeClr val="accent1"/>
+          </a:fillRef>
+          <a:effectRef idx="0">
+            <a:schemeClr val="accent1"/>
+          </a:effectRef>
+          <a:fontRef idx="minor">
+            <a:schemeClr val="lt1"/>
+          </a:fontRef>
+        </p:style>
+        <p:txBody>
+          <a:bodyPr rtlCol="0" anchor="ctr"/>
+          <a:lstStyle/>
+          <a:p>
+            <a:pPr algn="ctr"/>
+            <a:r>
+              <a:rPr lang="en-US" altLang="zh-CN" sz="1100">
+                <a:solidFill>
+                  <a:schemeClr val="tx1"/>
+                </a:solidFill>
+                <a:latin typeface="Abadi" panose="020B0604020104020204" pitchFamily="34" charset="0"/>
+              </a:rPr>
+              <a:t>Base.kerml</a:t>
+            </a:r>
+          </a:p>
+        </p:txBody>
+      </p:sp>
+      <p:sp>
+        <p:nvSpPr>
+          <p:cNvPr id="11" name="文本框 10">
+            <a:extLst>
+              <a:ext uri="{FF2B5EF4-FFF2-40B4-BE49-F238E27FC236}">
+                <a16:creationId xmlns:a16="http://schemas.microsoft.com/office/drawing/2014/main" id="{63E75676-4CFF-ED04-ECD6-CF163E4C0D57}"/>
+              </a:ext>
+            </a:extLst>
+          </p:cNvPr>
+          <p:cNvSpPr txBox="1"/>
+          <p:nvPr/>
+        </p:nvSpPr>
+        <p:spPr>
+          <a:xfrm>
+            <a:off x="6682160" y="258901"/>
+            <a:ext cx="3502023" cy="3170099"/>
+          </a:xfrm>
+          <a:prstGeom prst="rect">
+            <a:avLst/>
+          </a:prstGeom>
+          <a:noFill/>
+        </p:spPr>
+        <p:txBody>
+          <a:bodyPr wrap="square">
+            <a:spAutoFit/>
+          </a:bodyPr>
+          <a:lstStyle/>
+          <a:p>
+            <a:r>
+              <a:rPr lang="en-US" altLang="zh-CN" sz="500"/>
+              <a:t>SysML.library</a:t>
+            </a:r>
+          </a:p>
+          <a:p>
+            <a:pPr marL="457200" lvl="1"/>
+            <a:r>
+              <a:rPr lang="en-US" altLang="zh-CN" sz="500"/>
+              <a:t>Kernel Libraries</a:t>
+            </a:r>
+          </a:p>
+          <a:p>
+            <a:pPr marL="914400" lvl="2"/>
+            <a:r>
+              <a:rPr lang="en-US" altLang="zh-CN" sz="500"/>
+              <a:t>Kernel Semantic Library</a:t>
+            </a:r>
+          </a:p>
+          <a:p>
+            <a:pPr marL="1371600" lvl="3"/>
+            <a:r>
+              <a:rPr lang="en-US" altLang="zh-CN" sz="500"/>
+              <a:t>Clocks.kerml</a:t>
+            </a:r>
+          </a:p>
+          <a:p>
+            <a:pPr marL="1371600" lvl="3"/>
+            <a:r>
+              <a:rPr lang="en-US" altLang="zh-CN" sz="500"/>
+              <a:t>ControlPerformances.kerml</a:t>
+            </a:r>
+          </a:p>
+          <a:p>
+            <a:pPr marL="1371600" lvl="3"/>
+            <a:r>
+              <a:rPr lang="en-US" altLang="zh-CN" sz="500"/>
+              <a:t>FeatureReferencingPerformances.kerml</a:t>
+            </a:r>
+          </a:p>
+          <a:p>
+            <a:pPr marL="1371600" lvl="3"/>
+            <a:r>
+              <a:rPr lang="en-US" altLang="zh-CN" sz="500"/>
+              <a:t>KerML.kerml</a:t>
+            </a:r>
+          </a:p>
+          <a:p>
+            <a:pPr marL="1371600" lvl="3"/>
+            <a:r>
+              <a:rPr lang="en-US" altLang="zh-CN" sz="500"/>
+              <a:t>Links.kerml</a:t>
+            </a:r>
+          </a:p>
+          <a:p>
+            <a:pPr marL="1371600" lvl="3"/>
+            <a:r>
+              <a:rPr lang="en-US" altLang="zh-CN" sz="500"/>
+              <a:t>Metaobjects.kerml</a:t>
+            </a:r>
+          </a:p>
+          <a:p>
+            <a:pPr marL="1371600" lvl="3"/>
+            <a:r>
+              <a:rPr lang="en-US" altLang="zh-CN" sz="500"/>
+              <a:t>Objects.kerml</a:t>
+            </a:r>
+          </a:p>
+          <a:p>
+            <a:pPr marL="1371600" lvl="3"/>
+            <a:r>
+              <a:rPr lang="en-US" altLang="zh-CN" sz="500"/>
+              <a:t>Observation.kerml</a:t>
+            </a:r>
+          </a:p>
+          <a:p>
+            <a:pPr marL="1371600" lvl="3"/>
+            <a:r>
+              <a:rPr lang="en-US" altLang="zh-CN" sz="500"/>
+              <a:t>Occurrences.kerml</a:t>
+            </a:r>
+          </a:p>
+          <a:p>
+            <a:pPr marL="1371600" lvl="3"/>
+            <a:r>
+              <a:rPr lang="en-US" altLang="zh-CN" sz="500"/>
+              <a:t>Performances.kerml</a:t>
+            </a:r>
+          </a:p>
+          <a:p>
+            <a:pPr marL="1371600" lvl="3"/>
+            <a:r>
+              <a:rPr lang="en-US" altLang="zh-CN" sz="500"/>
+              <a:t>SpatialFrames.kerml</a:t>
+            </a:r>
+          </a:p>
+          <a:p>
+            <a:pPr marL="1371600" lvl="3"/>
+            <a:r>
+              <a:rPr lang="en-US" altLang="zh-CN" sz="500"/>
+              <a:t>StatePerformances.kerml</a:t>
+            </a:r>
+          </a:p>
+          <a:p>
+            <a:pPr marL="1371600" lvl="3"/>
+            <a:r>
+              <a:rPr lang="en-US" altLang="zh-CN" sz="500"/>
+              <a:t>Transfers.kerml</a:t>
+            </a:r>
+          </a:p>
+          <a:p>
+            <a:pPr marL="1371600" lvl="3"/>
+            <a:r>
+              <a:rPr lang="en-US" altLang="zh-CN" sz="500"/>
+              <a:t>TransitionPerformances.kerml</a:t>
+            </a:r>
+          </a:p>
+          <a:p>
+            <a:pPr marL="1371600" lvl="3"/>
+            <a:r>
+              <a:rPr lang="en-US" altLang="zh-CN" sz="500"/>
+              <a:t>Triggers.kerml</a:t>
+            </a:r>
+          </a:p>
+          <a:p>
+            <a:pPr marL="914400" lvl="2"/>
+            <a:r>
+              <a:rPr lang="en-US" altLang="zh-CN" sz="500"/>
+              <a:t>Kernel Data Type Library</a:t>
+            </a:r>
+          </a:p>
+          <a:p>
+            <a:pPr marL="1371600" lvl="3"/>
+            <a:r>
+              <a:rPr lang="en-US" altLang="zh-CN" sz="500"/>
+              <a:t>Collections.kerml</a:t>
+            </a:r>
+          </a:p>
+          <a:p>
+            <a:pPr marL="1371600" lvl="3"/>
+            <a:r>
+              <a:rPr lang="en-US" altLang="zh-CN" sz="500"/>
+              <a:t>VectorValues.kerml</a:t>
+            </a:r>
+          </a:p>
+          <a:p>
+            <a:pPr marL="914400" lvl="2"/>
+            <a:r>
+              <a:rPr lang="en-US" altLang="zh-CN" sz="500"/>
+              <a:t>Kernel Function Library</a:t>
+            </a:r>
+          </a:p>
+          <a:p>
+            <a:pPr marL="1371600" lvl="3"/>
+            <a:r>
+              <a:rPr lang="en-US" altLang="zh-CN" sz="500"/>
+              <a:t>BaseFunctions.kerml</a:t>
+            </a:r>
+          </a:p>
+          <a:p>
+            <a:pPr marL="1371600" lvl="3"/>
+            <a:r>
+              <a:rPr lang="en-US" altLang="zh-CN" sz="500"/>
+              <a:t>BooleanFunctions.kerml</a:t>
+            </a:r>
+          </a:p>
+          <a:p>
+            <a:pPr marL="1371600" lvl="3"/>
+            <a:r>
+              <a:rPr lang="en-US" altLang="zh-CN" sz="500"/>
+              <a:t>CollectionFunctions.kerml</a:t>
+            </a:r>
+          </a:p>
+          <a:p>
+            <a:pPr marL="1371600" lvl="3"/>
+            <a:r>
+              <a:rPr lang="en-US" altLang="zh-CN" sz="500"/>
+              <a:t>ComplexFunctions.kerml</a:t>
+            </a:r>
+          </a:p>
+          <a:p>
+            <a:pPr marL="1371600" lvl="3"/>
+            <a:r>
+              <a:rPr lang="en-US" altLang="zh-CN" sz="500"/>
+              <a:t>ControlFunctions.kerml</a:t>
+            </a:r>
+          </a:p>
+          <a:p>
+            <a:pPr marL="1371600" lvl="3"/>
+            <a:r>
+              <a:rPr lang="en-US" altLang="zh-CN" sz="500"/>
+              <a:t>DataFunctions.kerml</a:t>
+            </a:r>
+          </a:p>
+          <a:p>
+            <a:pPr marL="1371600" lvl="3"/>
+            <a:r>
+              <a:rPr lang="en-US" altLang="zh-CN" sz="500"/>
+              <a:t>IntegerFunctions.kerml</a:t>
+            </a:r>
+          </a:p>
+          <a:p>
+            <a:pPr marL="1371600" lvl="3"/>
+            <a:r>
+              <a:rPr lang="en-US" altLang="zh-CN" sz="500"/>
+              <a:t>NaturalFunctions.kerml</a:t>
+            </a:r>
+          </a:p>
+          <a:p>
+            <a:pPr marL="1371600" lvl="3"/>
+            <a:r>
+              <a:rPr lang="en-US" altLang="zh-CN" sz="500"/>
+              <a:t>NumbericalFunctions.kerml</a:t>
+            </a:r>
+          </a:p>
+          <a:p>
+            <a:pPr marL="1371600" lvl="3"/>
+            <a:r>
+              <a:rPr lang="en-US" altLang="zh-CN" sz="500"/>
+              <a:t>OccurrenceFunctions.kerml</a:t>
+            </a:r>
+          </a:p>
+          <a:p>
+            <a:pPr marL="1371600" lvl="3"/>
+            <a:r>
+              <a:rPr lang="en-US" altLang="zh-CN" sz="500"/>
+              <a:t>RationalFunctions.kerml</a:t>
+            </a:r>
+          </a:p>
+          <a:p>
+            <a:pPr marL="1371600" lvl="3"/>
+            <a:r>
+              <a:rPr lang="en-US" altLang="zh-CN" sz="500"/>
+              <a:t>RealFunctions.kerml</a:t>
+            </a:r>
+          </a:p>
+          <a:p>
+            <a:pPr marL="1371600" lvl="3"/>
+            <a:r>
+              <a:rPr lang="en-US" altLang="zh-CN" sz="500"/>
+              <a:t>ScalarFunctions.kerml</a:t>
+            </a:r>
+          </a:p>
+          <a:p>
+            <a:pPr marL="1371600" lvl="3"/>
+            <a:r>
+              <a:rPr lang="en-US" altLang="zh-CN" sz="500"/>
+              <a:t>SequenceFunctions.kerml</a:t>
+            </a:r>
+          </a:p>
+          <a:p>
+            <a:pPr marL="1371600" lvl="3"/>
+            <a:r>
+              <a:rPr lang="en-US" altLang="zh-CN" sz="500"/>
+              <a:t>StringFunctions.kerml</a:t>
+            </a:r>
+          </a:p>
+          <a:p>
+            <a:pPr marL="1371600" lvl="3"/>
+            <a:r>
+              <a:rPr lang="en-US" altLang="zh-CN" sz="500"/>
+              <a:t>TrigFunctions.kerml</a:t>
+            </a:r>
+          </a:p>
+          <a:p>
+            <a:pPr marL="1371600" lvl="3"/>
+            <a:r>
+              <a:rPr lang="en-US" altLang="zh-CN" sz="500"/>
+              <a:t>VectorFunctions.kerml</a:t>
+            </a:r>
+          </a:p>
+          <a:p>
+            <a:pPr marL="457200" lvl="1"/>
+            <a:endParaRPr lang="en-US" altLang="zh-CN" sz="500"/>
+          </a:p>
+        </p:txBody>
+      </p:sp>
+      <p:sp>
+        <p:nvSpPr>
+          <p:cNvPr id="13" name="文本框 12">
+            <a:extLst>
+              <a:ext uri="{FF2B5EF4-FFF2-40B4-BE49-F238E27FC236}">
+                <a16:creationId xmlns:a16="http://schemas.microsoft.com/office/drawing/2014/main" id="{566A3457-9C47-E7B2-1B44-5BC58C2CD98F}"/>
+              </a:ext>
+            </a:extLst>
+          </p:cNvPr>
+          <p:cNvSpPr txBox="1"/>
+          <p:nvPr/>
+        </p:nvSpPr>
+        <p:spPr>
+          <a:xfrm>
+            <a:off x="4825715" y="468732"/>
+            <a:ext cx="3389061" cy="3477875"/>
+          </a:xfrm>
+          <a:prstGeom prst="rect">
+            <a:avLst/>
+          </a:prstGeom>
+          <a:noFill/>
+        </p:spPr>
+        <p:txBody>
+          <a:bodyPr wrap="square">
+            <a:spAutoFit/>
+          </a:bodyPr>
+          <a:lstStyle/>
+          <a:p>
+            <a:pPr marL="457200" lvl="1"/>
+            <a:r>
+              <a:rPr lang="en-US" altLang="zh-CN" sz="500"/>
+              <a:t>Domain Libraries</a:t>
+            </a:r>
+          </a:p>
+          <a:p>
+            <a:pPr marL="914400" lvl="2"/>
+            <a:r>
+              <a:rPr lang="en-US" altLang="zh-CN" sz="500"/>
+              <a:t>Analysis</a:t>
+            </a:r>
+          </a:p>
+          <a:p>
+            <a:pPr marL="1371600" lvl="3"/>
+            <a:r>
+              <a:rPr lang="en-US" altLang="zh-CN" sz="500"/>
+              <a:t>AnalysisTooling.sysml</a:t>
+            </a:r>
+          </a:p>
+          <a:p>
+            <a:pPr marL="1371600" lvl="3"/>
+            <a:r>
+              <a:rPr lang="en-US" altLang="zh-CN" sz="500"/>
+              <a:t>SampledFunctions.sysml</a:t>
+            </a:r>
+          </a:p>
+          <a:p>
+            <a:pPr marL="1371600" lvl="3"/>
+            <a:r>
+              <a:rPr lang="en-US" altLang="zh-CN" sz="500"/>
+              <a:t>StateSpaceRepresentation.sysml</a:t>
+            </a:r>
+          </a:p>
+          <a:p>
+            <a:pPr marL="1371600" lvl="3"/>
+            <a:r>
+              <a:rPr lang="en-US" altLang="zh-CN" sz="500"/>
+              <a:t>TradeStudies.sysml</a:t>
+            </a:r>
+          </a:p>
+          <a:p>
+            <a:pPr marL="914400" lvl="2"/>
+            <a:r>
+              <a:rPr lang="en-US" altLang="zh-CN" sz="500"/>
+              <a:t>Cause and Effect</a:t>
+            </a:r>
+          </a:p>
+          <a:p>
+            <a:pPr marL="1371600" lvl="3"/>
+            <a:r>
+              <a:rPr lang="en-US" altLang="zh-CN" sz="500"/>
+              <a:t>CausationConnections.sysml</a:t>
+            </a:r>
+          </a:p>
+          <a:p>
+            <a:pPr marL="1371600" lvl="3"/>
+            <a:r>
+              <a:rPr lang="en-US" altLang="zh-CN" sz="500"/>
+              <a:t>CauseAndEffect.sysml</a:t>
+            </a:r>
+          </a:p>
+          <a:p>
+            <a:pPr marL="914400" lvl="2"/>
+            <a:r>
+              <a:rPr lang="en-US" altLang="zh-CN" sz="500"/>
+              <a:t>Geometry</a:t>
+            </a:r>
+          </a:p>
+          <a:p>
+            <a:pPr marL="1371600" lvl="3"/>
+            <a:r>
+              <a:rPr lang="en-US" altLang="zh-CN" sz="500"/>
+              <a:t>ShapeItems.sysml</a:t>
+            </a:r>
+          </a:p>
+          <a:p>
+            <a:pPr marL="1371600" lvl="3"/>
+            <a:r>
+              <a:rPr lang="en-US" altLang="zh-CN" sz="500"/>
+              <a:t>SpatialItems.sysml</a:t>
+            </a:r>
+          </a:p>
+          <a:p>
+            <a:pPr marL="914400" lvl="2"/>
+            <a:r>
+              <a:rPr lang="en-US" altLang="zh-CN" sz="500"/>
+              <a:t>Metadata</a:t>
+            </a:r>
+          </a:p>
+          <a:p>
+            <a:pPr marL="1371600" lvl="3"/>
+            <a:r>
+              <a:rPr lang="en-US" altLang="zh-CN" sz="500"/>
+              <a:t>ImageMetadata.sysml</a:t>
+            </a:r>
+          </a:p>
+          <a:p>
+            <a:pPr marL="1371600" lvl="3"/>
+            <a:r>
+              <a:rPr lang="en-US" altLang="zh-CN" sz="500"/>
+              <a:t>ModelingMetadata.sysml</a:t>
+            </a:r>
+          </a:p>
+          <a:p>
+            <a:pPr marL="1371600" lvl="3"/>
+            <a:r>
+              <a:rPr lang="en-US" altLang="zh-CN" sz="500"/>
+              <a:t>ParameterOfInterestMetadata.sysml</a:t>
+            </a:r>
+          </a:p>
+          <a:p>
+            <a:pPr marL="1371600" lvl="3"/>
+            <a:r>
+              <a:rPr lang="en-US" altLang="zh-CN" sz="500"/>
+              <a:t>RiskMetadata.sysml</a:t>
+            </a:r>
+          </a:p>
+          <a:p>
+            <a:pPr marL="914400" lvl="2"/>
+            <a:r>
+              <a:rPr lang="en-US" altLang="zh-CN" sz="500"/>
+              <a:t>Quantities and Units</a:t>
+            </a:r>
+          </a:p>
+          <a:p>
+            <a:pPr marL="1371600" lvl="3"/>
+            <a:r>
+              <a:rPr lang="en-US" altLang="zh-CN" sz="500"/>
+              <a:t>ISQ.sysml</a:t>
+            </a:r>
+          </a:p>
+          <a:p>
+            <a:pPr marL="1371600" lvl="3"/>
+            <a:r>
+              <a:rPr lang="en-US" altLang="zh-CN" sz="500"/>
+              <a:t>ISQAcoustics.sysml</a:t>
+            </a:r>
+          </a:p>
+          <a:p>
+            <a:pPr marL="1371600" lvl="3"/>
+            <a:r>
+              <a:rPr lang="en-US" altLang="zh-CN" sz="500"/>
+              <a:t>ISQAtomicNuclear.sysml</a:t>
+            </a:r>
+          </a:p>
+          <a:p>
+            <a:pPr marL="1371600" lvl="3"/>
+            <a:r>
+              <a:rPr lang="en-US" altLang="zh-CN" sz="500"/>
+              <a:t>ISQBase.sysml</a:t>
+            </a:r>
+          </a:p>
+          <a:p>
+            <a:pPr marL="1371600" lvl="3"/>
+            <a:r>
+              <a:rPr lang="en-US" altLang="zh-CN" sz="500"/>
+              <a:t>ISQCharacteristicNumbers.sysml</a:t>
+            </a:r>
+          </a:p>
+          <a:p>
+            <a:pPr marL="1371600" lvl="3"/>
+            <a:r>
+              <a:rPr lang="en-US" altLang="zh-CN" sz="500"/>
+              <a:t>ISQChemistryMolecular.sysml</a:t>
+            </a:r>
+          </a:p>
+          <a:p>
+            <a:pPr marL="1371600" lvl="3"/>
+            <a:r>
+              <a:rPr lang="en-US" altLang="zh-CN" sz="500"/>
+              <a:t>ISQCondensedMatter.sysml</a:t>
+            </a:r>
+          </a:p>
+          <a:p>
+            <a:pPr marL="1371600" lvl="3"/>
+            <a:r>
+              <a:rPr lang="en-US" altLang="zh-CN" sz="500"/>
+              <a:t>ISQElectromagnetism.sysml</a:t>
+            </a:r>
+          </a:p>
+          <a:p>
+            <a:pPr marL="1371600" lvl="3"/>
+            <a:r>
+              <a:rPr lang="en-US" altLang="zh-CN" sz="500"/>
+              <a:t>ISQInformation.sysml</a:t>
+            </a:r>
+          </a:p>
+          <a:p>
+            <a:pPr marL="1371600" lvl="3"/>
+            <a:r>
+              <a:rPr lang="en-US" altLang="zh-CN" sz="500"/>
+              <a:t>ISQLight.sysml</a:t>
+            </a:r>
+          </a:p>
+          <a:p>
+            <a:pPr marL="1371600" lvl="3"/>
+            <a:r>
+              <a:rPr lang="en-US" altLang="zh-CN" sz="500"/>
+              <a:t>ISQMechanics.sysml</a:t>
+            </a:r>
+          </a:p>
+          <a:p>
+            <a:pPr marL="1371600" lvl="3"/>
+            <a:r>
+              <a:rPr lang="en-US" altLang="zh-CN" sz="500"/>
+              <a:t>ISQSpaceTime.sysml</a:t>
+            </a:r>
+          </a:p>
+          <a:p>
+            <a:pPr marL="1371600" lvl="3"/>
+            <a:r>
+              <a:rPr lang="en-US" altLang="zh-CN" sz="500"/>
+              <a:t>ISQThermodynamtics.sysml</a:t>
+            </a:r>
+          </a:p>
+          <a:p>
+            <a:pPr marL="1371600" lvl="3"/>
+            <a:r>
+              <a:rPr lang="en-US" altLang="zh-CN" sz="500"/>
+              <a:t>MeasurementRefCalculations.sysml</a:t>
+            </a:r>
+          </a:p>
+          <a:p>
+            <a:pPr marL="1371600" lvl="3"/>
+            <a:r>
+              <a:rPr lang="en-US" altLang="zh-CN" sz="500"/>
+              <a:t>MeasurementReferences.sysml</a:t>
+            </a:r>
+          </a:p>
+          <a:p>
+            <a:pPr marL="1371600" lvl="3"/>
+            <a:r>
+              <a:rPr lang="en-US" altLang="zh-CN" sz="500"/>
+              <a:t>Quantities.sysml</a:t>
+            </a:r>
+          </a:p>
+          <a:p>
+            <a:pPr marL="1371600" lvl="3"/>
+            <a:r>
+              <a:rPr lang="en-US" altLang="zh-CN" sz="500"/>
+              <a:t>QuantityCalculations.sysml</a:t>
+            </a:r>
+          </a:p>
+          <a:p>
+            <a:pPr marL="1371600" lvl="3"/>
+            <a:r>
+              <a:rPr lang="en-US" altLang="zh-CN" sz="500"/>
+              <a:t>SI.sysml</a:t>
+            </a:r>
+          </a:p>
+          <a:p>
+            <a:pPr marL="1371600" lvl="3"/>
+            <a:r>
+              <a:rPr lang="en-US" altLang="zh-CN" sz="500"/>
+              <a:t>SIPrefixes.sysml</a:t>
+            </a:r>
+          </a:p>
+          <a:p>
+            <a:pPr marL="1371600" lvl="3"/>
+            <a:r>
+              <a:rPr lang="en-US" altLang="zh-CN" sz="500"/>
+              <a:t>TensorCalculations.sysml</a:t>
+            </a:r>
+          </a:p>
+          <a:p>
+            <a:pPr marL="1371600" lvl="3"/>
+            <a:r>
+              <a:rPr lang="en-US" altLang="zh-CN" sz="500"/>
+              <a:t>Time.sysml</a:t>
+            </a:r>
+          </a:p>
+          <a:p>
+            <a:pPr marL="1371600" lvl="3"/>
+            <a:r>
+              <a:rPr lang="en-US" altLang="zh-CN" sz="500"/>
+              <a:t>USCustomaryUnits.sysml</a:t>
+            </a:r>
+          </a:p>
+          <a:p>
+            <a:pPr marL="1371600" lvl="3"/>
+            <a:r>
+              <a:rPr lang="en-US" altLang="zh-CN" sz="500"/>
+              <a:t>VectorCalculations.sysml</a:t>
+            </a:r>
+          </a:p>
+          <a:p>
+            <a:pPr marL="914400" lvl="2"/>
+            <a:r>
+              <a:rPr lang="en-US" altLang="zh-CN" sz="500"/>
+              <a:t>Requriement Derivation</a:t>
+            </a:r>
+          </a:p>
+          <a:p>
+            <a:pPr marL="1371600" lvl="3"/>
+            <a:r>
+              <a:rPr lang="en-US" altLang="zh-CN" sz="500"/>
+              <a:t>DericationConnections.sysml</a:t>
+            </a:r>
+          </a:p>
+          <a:p>
+            <a:pPr marL="1371600" lvl="3"/>
+            <a:r>
+              <a:rPr lang="en-US" altLang="zh-CN" sz="500"/>
+              <a:t>RequirementDerivation.sysml</a:t>
+            </a:r>
+            <a:endParaRPr lang="zh-CN" altLang="en-US" sz="500"/>
+          </a:p>
+        </p:txBody>
+      </p:sp>
+      <p:sp>
+        <p:nvSpPr>
+          <p:cNvPr id="15" name="文本框 14">
+            <a:extLst>
+              <a:ext uri="{FF2B5EF4-FFF2-40B4-BE49-F238E27FC236}">
+                <a16:creationId xmlns:a16="http://schemas.microsoft.com/office/drawing/2014/main" id="{A3B5EDF9-3678-EA62-462C-79218E50C5F3}"/>
+              </a:ext>
+            </a:extLst>
+          </p:cNvPr>
+          <p:cNvSpPr txBox="1"/>
+          <p:nvPr/>
+        </p:nvSpPr>
+        <p:spPr>
+          <a:xfrm>
+            <a:off x="5378780" y="4507531"/>
+            <a:ext cx="2835996" cy="1785104"/>
+          </a:xfrm>
+          <a:prstGeom prst="rect">
+            <a:avLst/>
+          </a:prstGeom>
+          <a:noFill/>
+        </p:spPr>
+        <p:txBody>
+          <a:bodyPr wrap="square">
+            <a:spAutoFit/>
+          </a:bodyPr>
+          <a:lstStyle/>
+          <a:p>
+            <a:pPr marL="457200" lvl="1"/>
+            <a:r>
+              <a:rPr lang="en-US" altLang="zh-CN" sz="500"/>
+              <a:t>Systems Library</a:t>
+            </a:r>
+          </a:p>
+          <a:p>
+            <a:pPr marL="914400" lvl="2"/>
+            <a:r>
+              <a:rPr lang="en-US" altLang="zh-CN" sz="500"/>
+              <a:t>Systems Library</a:t>
+            </a:r>
+          </a:p>
+          <a:p>
+            <a:pPr marL="1371600" lvl="3"/>
+            <a:r>
+              <a:rPr lang="en-US" altLang="zh-CN" sz="500"/>
+              <a:t>Actions.sysml</a:t>
+            </a:r>
+          </a:p>
+          <a:p>
+            <a:pPr marL="1371600" lvl="3"/>
+            <a:r>
+              <a:rPr lang="en-US" altLang="zh-CN" sz="500"/>
+              <a:t>Allocations.sysml</a:t>
+            </a:r>
+          </a:p>
+          <a:p>
+            <a:pPr marL="1371600" lvl="3"/>
+            <a:r>
+              <a:rPr lang="en-US" altLang="zh-CN" sz="500"/>
+              <a:t>AnalysisCases.sysml</a:t>
+            </a:r>
+          </a:p>
+          <a:p>
+            <a:pPr marL="1371600" lvl="3"/>
+            <a:r>
+              <a:rPr lang="en-US" altLang="zh-CN" sz="500"/>
+              <a:t>Attributes.sysml</a:t>
+            </a:r>
+          </a:p>
+          <a:p>
+            <a:pPr marL="1371600" lvl="3"/>
+            <a:r>
+              <a:rPr lang="en-US" altLang="zh-CN" sz="500"/>
+              <a:t>Calculations.sysml</a:t>
+            </a:r>
+          </a:p>
+          <a:p>
+            <a:pPr marL="1371600" lvl="3"/>
+            <a:r>
+              <a:rPr lang="en-US" altLang="zh-CN" sz="500"/>
+              <a:t>Cases.sysml</a:t>
+            </a:r>
+          </a:p>
+          <a:p>
+            <a:pPr marL="1371600" lvl="3"/>
+            <a:r>
+              <a:rPr lang="en-US" altLang="zh-CN" sz="500"/>
+              <a:t>Connections.sysml</a:t>
+            </a:r>
+          </a:p>
+          <a:p>
+            <a:pPr marL="1371600" lvl="3"/>
+            <a:r>
+              <a:rPr lang="en-US" altLang="zh-CN" sz="500"/>
+              <a:t>Constraints.sysml</a:t>
+            </a:r>
+          </a:p>
+          <a:p>
+            <a:pPr marL="1371600" lvl="3"/>
+            <a:r>
+              <a:rPr lang="en-US" altLang="zh-CN" sz="500"/>
+              <a:t>Interfaces.sysml</a:t>
+            </a:r>
+          </a:p>
+          <a:p>
+            <a:pPr marL="1371600" lvl="3"/>
+            <a:r>
+              <a:rPr lang="en-US" altLang="zh-CN" sz="500"/>
+              <a:t>Items.sysml</a:t>
+            </a:r>
+          </a:p>
+          <a:p>
+            <a:pPr marL="1371600" lvl="3"/>
+            <a:r>
+              <a:rPr lang="en-US" altLang="zh-CN" sz="500"/>
+              <a:t>Metadata.sysml</a:t>
+            </a:r>
+          </a:p>
+          <a:p>
+            <a:pPr marL="1371600" lvl="3"/>
+            <a:r>
+              <a:rPr lang="en-US" altLang="zh-CN" sz="500"/>
+              <a:t>Parts.sysml</a:t>
+            </a:r>
+          </a:p>
+          <a:p>
+            <a:pPr marL="1371600" lvl="3"/>
+            <a:r>
+              <a:rPr lang="en-US" altLang="zh-CN" sz="500"/>
+              <a:t>Ports.sysml</a:t>
+            </a:r>
+          </a:p>
+          <a:p>
+            <a:pPr marL="1371600" lvl="3"/>
+            <a:r>
+              <a:rPr lang="en-US" altLang="zh-CN" sz="500"/>
+              <a:t>Requirements.sysml</a:t>
+            </a:r>
+          </a:p>
+          <a:p>
+            <a:pPr marL="1371600" lvl="3"/>
+            <a:r>
+              <a:rPr lang="en-US" altLang="zh-CN" sz="500"/>
+              <a:t>StandardViewDefinitions.sysml</a:t>
+            </a:r>
+          </a:p>
+          <a:p>
+            <a:pPr marL="1371600" lvl="3"/>
+            <a:r>
+              <a:rPr lang="en-US" altLang="zh-CN" sz="500"/>
+              <a:t>States.sysml</a:t>
+            </a:r>
+          </a:p>
+          <a:p>
+            <a:pPr marL="1371600" lvl="3"/>
+            <a:r>
+              <a:rPr lang="en-US" altLang="zh-CN" sz="500"/>
+              <a:t>SysML.sysml</a:t>
+            </a:r>
+          </a:p>
+          <a:p>
+            <a:pPr marL="1371600" lvl="3"/>
+            <a:r>
+              <a:rPr lang="en-US" altLang="zh-CN" sz="500"/>
+              <a:t>UseCases.sysml</a:t>
+            </a:r>
+          </a:p>
+          <a:p>
+            <a:pPr marL="1371600" lvl="3"/>
+            <a:r>
+              <a:rPr lang="en-US" altLang="zh-CN" sz="500"/>
+              <a:t>Verifications.sysml</a:t>
+            </a:r>
+          </a:p>
+          <a:p>
+            <a:pPr marL="1371600" lvl="3"/>
+            <a:r>
+              <a:rPr lang="en-US" altLang="zh-CN" sz="500"/>
+              <a:t>Views.sysml</a:t>
+            </a:r>
+          </a:p>
+        </p:txBody>
+      </p:sp>
+      <p:sp>
+        <p:nvSpPr>
+          <p:cNvPr id="16" name="矩形 15">
+            <a:extLst>
+              <a:ext uri="{FF2B5EF4-FFF2-40B4-BE49-F238E27FC236}">
+                <a16:creationId xmlns:a16="http://schemas.microsoft.com/office/drawing/2014/main" id="{54F1E87F-2DC8-31E1-DD7C-E3BCEA4BFF09}"/>
+              </a:ext>
+            </a:extLst>
+          </p:cNvPr>
+          <p:cNvSpPr/>
+          <p:nvPr/>
+        </p:nvSpPr>
+        <p:spPr>
+          <a:xfrm>
+            <a:off x="1472828" y="1902392"/>
+            <a:ext cx="1069733" cy="213901"/>
+          </a:xfrm>
+          <a:prstGeom prst="rect">
+            <a:avLst/>
+          </a:prstGeom>
+          <a:solidFill>
+            <a:schemeClr val="bg1"/>
+          </a:solidFill>
+          <a:ln w="19050">
+            <a:solidFill>
+              <a:srgbClr val="ECBF84"/>
+            </a:solidFill>
+          </a:ln>
+          <a:effectLst>
+            <a:outerShdw blurRad="50800" dist="38100" dir="2700000" algn="tl" rotWithShape="0">
+              <a:prstClr val="black">
+                <a:alpha val="40000"/>
+              </a:prstClr>
+            </a:outerShdw>
+          </a:effectLst>
+        </p:spPr>
+        <p:style>
+          <a:lnRef idx="2">
+            <a:schemeClr val="accent1">
+              <a:shade val="15000"/>
+            </a:schemeClr>
+          </a:lnRef>
+          <a:fillRef idx="1">
+            <a:schemeClr val="accent1"/>
+          </a:fillRef>
+          <a:effectRef idx="0">
+            <a:schemeClr val="accent1"/>
+          </a:effectRef>
+          <a:fontRef idx="minor">
+            <a:schemeClr val="lt1"/>
+          </a:fontRef>
+        </p:style>
+        <p:txBody>
+          <a:bodyPr rtlCol="0" anchor="ctr"/>
+          <a:lstStyle/>
+          <a:p>
+            <a:pPr algn="ctr"/>
+            <a:r>
+              <a:rPr lang="en-US" altLang="zh-CN" sz="1100">
+                <a:solidFill>
+                  <a:schemeClr val="tx1"/>
+                </a:solidFill>
+                <a:latin typeface="Abadi" panose="020B0604020104020204" pitchFamily="34" charset="0"/>
+              </a:rPr>
+              <a:t>Base.sysml</a:t>
+            </a:r>
+          </a:p>
+        </p:txBody>
+      </p:sp>
+      <p:sp>
+        <p:nvSpPr>
+          <p:cNvPr id="17" name="矩形 16">
+            <a:extLst>
+              <a:ext uri="{FF2B5EF4-FFF2-40B4-BE49-F238E27FC236}">
+                <a16:creationId xmlns:a16="http://schemas.microsoft.com/office/drawing/2014/main" id="{C39C3E09-5266-43F0-730E-F64DE7170203}"/>
+              </a:ext>
+            </a:extLst>
+          </p:cNvPr>
+          <p:cNvSpPr/>
+          <p:nvPr/>
+        </p:nvSpPr>
+        <p:spPr>
+          <a:xfrm>
+            <a:off x="1472828" y="1497598"/>
+            <a:ext cx="1597244" cy="213901"/>
+          </a:xfrm>
+          <a:prstGeom prst="rect">
+            <a:avLst/>
+          </a:prstGeom>
+          <a:solidFill>
+            <a:schemeClr val="bg1"/>
+          </a:solidFill>
+          <a:ln w="19050">
+            <a:solidFill>
+              <a:srgbClr val="AEEC84"/>
+            </a:solidFill>
+          </a:ln>
+          <a:effectLst>
+            <a:outerShdw blurRad="50800" dist="38100" dir="2700000" algn="tl" rotWithShape="0">
+              <a:prstClr val="black">
+                <a:alpha val="40000"/>
+              </a:prstClr>
+            </a:outerShdw>
+          </a:effectLst>
+        </p:spPr>
+        <p:style>
+          <a:lnRef idx="2">
+            <a:schemeClr val="accent1">
+              <a:shade val="15000"/>
+            </a:schemeClr>
+          </a:lnRef>
+          <a:fillRef idx="1">
+            <a:schemeClr val="accent1"/>
+          </a:fillRef>
+          <a:effectRef idx="0">
+            <a:schemeClr val="accent1"/>
+          </a:effectRef>
+          <a:fontRef idx="minor">
+            <a:schemeClr val="lt1"/>
+          </a:fontRef>
+        </p:style>
+        <p:txBody>
+          <a:bodyPr rtlCol="0" anchor="ctr"/>
+          <a:lstStyle/>
+          <a:p>
+            <a:pPr algn="ctr"/>
+            <a:r>
+              <a:rPr lang="en-US" altLang="zh-CN" sz="1100">
+                <a:solidFill>
+                  <a:schemeClr val="tx1"/>
+                </a:solidFill>
+                <a:latin typeface="Abadi" panose="020B0604020104020204" pitchFamily="34" charset="0"/>
+              </a:rPr>
+              <a:t>ScalarValues.kerml</a:t>
+            </a:r>
+          </a:p>
+        </p:txBody>
+      </p:sp>
+    </p:spTree>
+    <p:extLst>
+      <p:ext uri="{BB962C8B-B14F-4D97-AF65-F5344CB8AC3E}">
+        <p14:creationId xmlns:p14="http://schemas.microsoft.com/office/powerpoint/2010/main" val="383575952"/>
+      </p:ext>
+    </p:extLst>
+  </p:cSld>
+  <p:clrMapOvr>
+    <a:masterClrMapping/>
+  </p:clrMapOvr>
+</p:sld>
+</file>
+
+<file path=ppt/slides/slide3.xml><?xml version="1.0" encoding="utf-8"?>
+<p:sld xmlns:a="http://schemas.openxmlformats.org/drawingml/2006/main" xmlns:r="http://schemas.openxmlformats.org/officeDocument/2006/relationships" xmlns:p="http://schemas.openxmlformats.org/presentationml/2006/main">
+  <p:cSld>
+    <p:spTree>
+      <p:nvGrpSpPr>
+        <p:cNvPr id="1" name="">
+          <a:extLst>
+            <a:ext uri="{FF2B5EF4-FFF2-40B4-BE49-F238E27FC236}">
+              <a16:creationId xmlns:a16="http://schemas.microsoft.com/office/drawing/2014/main" id="{64A64970-CAED-5FAE-9AD0-C98473CC7A3B}"/>
+            </a:ext>
+          </a:extLst>
+        </p:cNvPr>
+        <p:cNvGrpSpPr/>
+        <p:nvPr/>
+      </p:nvGrpSpPr>
+      <p:grpSpPr>
+        <a:xfrm>
+          <a:off x="0" y="0"/>
+          <a:ext cx="0" cy="0"/>
+          <a:chOff x="0" y="0"/>
+          <a:chExt cx="0" cy="0"/>
+        </a:xfrm>
+      </p:grpSpPr>
+      <p:sp>
+        <p:nvSpPr>
+          <p:cNvPr id="11" name="文本框 10">
+            <a:extLst>
+              <a:ext uri="{FF2B5EF4-FFF2-40B4-BE49-F238E27FC236}">
+                <a16:creationId xmlns:a16="http://schemas.microsoft.com/office/drawing/2014/main" id="{7AD57A1A-3600-0743-0473-C9CFF1065D40}"/>
+              </a:ext>
+            </a:extLst>
+          </p:cNvPr>
+          <p:cNvSpPr txBox="1"/>
+          <p:nvPr/>
+        </p:nvSpPr>
+        <p:spPr>
+          <a:xfrm>
+            <a:off x="156605" y="1071111"/>
+            <a:ext cx="3502023" cy="3323987"/>
+          </a:xfrm>
+          <a:prstGeom prst="rect">
+            <a:avLst/>
+          </a:prstGeom>
+          <a:noFill/>
+        </p:spPr>
+        <p:txBody>
+          <a:bodyPr wrap="square">
+            <a:spAutoFit/>
+          </a:bodyPr>
+          <a:lstStyle/>
+          <a:p>
+            <a:pPr>
+              <a:buFont typeface="Arial" panose="020B0604020202020204" pitchFamily="34" charset="0"/>
+              <a:buChar char="•"/>
+            </a:pPr>
+            <a:r>
+              <a:rPr lang="en-US" altLang="zh-CN" sz="500"/>
+              <a:t>SysML.library</a:t>
+            </a:r>
+          </a:p>
+          <a:p>
+            <a:pPr marL="742950" lvl="1" indent="-285750">
+              <a:buFont typeface="Arial" panose="020B0604020202020204" pitchFamily="34" charset="0"/>
+              <a:buChar char="•"/>
+            </a:pPr>
+            <a:r>
+              <a:rPr lang="en-US" altLang="zh-CN" sz="500"/>
+              <a:t>Kernel Libraries</a:t>
+            </a:r>
+          </a:p>
+          <a:p>
+            <a:pPr marL="1143000" lvl="2" indent="-228600">
+              <a:buFont typeface="Arial" panose="020B0604020202020204" pitchFamily="34" charset="0"/>
+              <a:buChar char="•"/>
+            </a:pPr>
+            <a:r>
+              <a:rPr lang="en-US" altLang="zh-CN" sz="500"/>
+              <a:t>Kernel Semantic Library</a:t>
+            </a:r>
+          </a:p>
+          <a:p>
+            <a:pPr marL="1600200" lvl="3" indent="-228600">
+              <a:buFont typeface="Arial" panose="020B0604020202020204" pitchFamily="34" charset="0"/>
+              <a:buChar char="•"/>
+            </a:pPr>
+            <a:r>
+              <a:rPr lang="en-US" altLang="zh-CN" sz="500"/>
+              <a:t>Base.kerml</a:t>
+            </a:r>
+          </a:p>
+          <a:p>
+            <a:pPr marL="1600200" lvl="3" indent="-228600">
+              <a:buFont typeface="Arial" panose="020B0604020202020204" pitchFamily="34" charset="0"/>
+              <a:buChar char="•"/>
+            </a:pPr>
+            <a:r>
+              <a:rPr lang="en-US" altLang="zh-CN" sz="500"/>
+              <a:t>Clocks.kerml</a:t>
+            </a:r>
+          </a:p>
+          <a:p>
+            <a:pPr marL="1600200" lvl="3" indent="-228600">
+              <a:buFont typeface="Arial" panose="020B0604020202020204" pitchFamily="34" charset="0"/>
+              <a:buChar char="•"/>
+            </a:pPr>
+            <a:r>
+              <a:rPr lang="en-US" altLang="zh-CN" sz="500"/>
+              <a:t>ControlPerformances.kerml</a:t>
+            </a:r>
+          </a:p>
+          <a:p>
+            <a:pPr marL="1600200" lvl="3" indent="-228600">
+              <a:buFont typeface="Arial" panose="020B0604020202020204" pitchFamily="34" charset="0"/>
+              <a:buChar char="•"/>
+            </a:pPr>
+            <a:r>
+              <a:rPr lang="en-US" altLang="zh-CN" sz="500"/>
+              <a:t>FeatureReferencingPerformances.kerml</a:t>
+            </a:r>
+          </a:p>
+          <a:p>
+            <a:pPr marL="1600200" lvl="3" indent="-228600">
+              <a:buFont typeface="Arial" panose="020B0604020202020204" pitchFamily="34" charset="0"/>
+              <a:buChar char="•"/>
+            </a:pPr>
+            <a:r>
+              <a:rPr lang="en-US" altLang="zh-CN" sz="500"/>
+              <a:t>KerML.kerml</a:t>
+            </a:r>
+          </a:p>
+          <a:p>
+            <a:pPr marL="1600200" lvl="3" indent="-228600">
+              <a:buFont typeface="Arial" panose="020B0604020202020204" pitchFamily="34" charset="0"/>
+              <a:buChar char="•"/>
+            </a:pPr>
+            <a:r>
+              <a:rPr lang="en-US" altLang="zh-CN" sz="500"/>
+              <a:t>Links.kerml</a:t>
+            </a:r>
+          </a:p>
+          <a:p>
+            <a:pPr marL="1600200" lvl="3" indent="-228600">
+              <a:buFont typeface="Arial" panose="020B0604020202020204" pitchFamily="34" charset="0"/>
+              <a:buChar char="•"/>
+            </a:pPr>
+            <a:r>
+              <a:rPr lang="en-US" altLang="zh-CN" sz="500"/>
+              <a:t>Metaobjects.kerml</a:t>
+            </a:r>
+          </a:p>
+          <a:p>
+            <a:pPr marL="1600200" lvl="3" indent="-228600">
+              <a:buFont typeface="Arial" panose="020B0604020202020204" pitchFamily="34" charset="0"/>
+              <a:buChar char="•"/>
+            </a:pPr>
+            <a:r>
+              <a:rPr lang="en-US" altLang="zh-CN" sz="500"/>
+              <a:t>Objects.kerml</a:t>
+            </a:r>
+          </a:p>
+          <a:p>
+            <a:pPr marL="1600200" lvl="3" indent="-228600">
+              <a:buFont typeface="Arial" panose="020B0604020202020204" pitchFamily="34" charset="0"/>
+              <a:buChar char="•"/>
+            </a:pPr>
+            <a:r>
+              <a:rPr lang="en-US" altLang="zh-CN" sz="500"/>
+              <a:t>Observation.kerml</a:t>
+            </a:r>
+          </a:p>
+          <a:p>
+            <a:pPr marL="1600200" lvl="3" indent="-228600">
+              <a:buFont typeface="Arial" panose="020B0604020202020204" pitchFamily="34" charset="0"/>
+              <a:buChar char="•"/>
+            </a:pPr>
+            <a:r>
+              <a:rPr lang="en-US" altLang="zh-CN" sz="500"/>
+              <a:t>Occurrences.kerml</a:t>
+            </a:r>
+          </a:p>
+          <a:p>
+            <a:pPr marL="1600200" lvl="3" indent="-228600">
+              <a:buFont typeface="Arial" panose="020B0604020202020204" pitchFamily="34" charset="0"/>
+              <a:buChar char="•"/>
+            </a:pPr>
+            <a:r>
+              <a:rPr lang="en-US" altLang="zh-CN" sz="500"/>
+              <a:t>Performances.kerml</a:t>
+            </a:r>
+          </a:p>
+          <a:p>
+            <a:pPr marL="1600200" lvl="3" indent="-228600">
+              <a:buFont typeface="Arial" panose="020B0604020202020204" pitchFamily="34" charset="0"/>
+              <a:buChar char="•"/>
+            </a:pPr>
+            <a:r>
+              <a:rPr lang="en-US" altLang="zh-CN" sz="500"/>
+              <a:t>SpatialFrames.kerml</a:t>
+            </a:r>
+          </a:p>
+          <a:p>
+            <a:pPr marL="1600200" lvl="3" indent="-228600">
+              <a:buFont typeface="Arial" panose="020B0604020202020204" pitchFamily="34" charset="0"/>
+              <a:buChar char="•"/>
+            </a:pPr>
+            <a:r>
+              <a:rPr lang="en-US" altLang="zh-CN" sz="500"/>
+              <a:t>StatePerformances.kerml</a:t>
+            </a:r>
+          </a:p>
+          <a:p>
+            <a:pPr marL="1600200" lvl="3" indent="-228600">
+              <a:buFont typeface="Arial" panose="020B0604020202020204" pitchFamily="34" charset="0"/>
+              <a:buChar char="•"/>
+            </a:pPr>
+            <a:r>
+              <a:rPr lang="en-US" altLang="zh-CN" sz="500"/>
+              <a:t>Transfers.kerml</a:t>
+            </a:r>
+          </a:p>
+          <a:p>
+            <a:pPr marL="1600200" lvl="3" indent="-228600">
+              <a:buFont typeface="Arial" panose="020B0604020202020204" pitchFamily="34" charset="0"/>
+              <a:buChar char="•"/>
+            </a:pPr>
+            <a:r>
+              <a:rPr lang="en-US" altLang="zh-CN" sz="500"/>
+              <a:t>TransitionPerformances.kerml</a:t>
+            </a:r>
+          </a:p>
+          <a:p>
+            <a:pPr marL="1600200" lvl="3" indent="-228600">
+              <a:buFont typeface="Arial" panose="020B0604020202020204" pitchFamily="34" charset="0"/>
+              <a:buChar char="•"/>
+            </a:pPr>
+            <a:r>
+              <a:rPr lang="en-US" altLang="zh-CN" sz="500"/>
+              <a:t>Triggers.kerml</a:t>
+            </a:r>
+          </a:p>
+          <a:p>
+            <a:pPr marL="1143000" lvl="2" indent="-228600">
+              <a:buFont typeface="Arial" panose="020B0604020202020204" pitchFamily="34" charset="0"/>
+              <a:buChar char="•"/>
+            </a:pPr>
+            <a:r>
+              <a:rPr lang="en-US" altLang="zh-CN" sz="500"/>
+              <a:t>Kernel Data Type Library</a:t>
+            </a:r>
+          </a:p>
+          <a:p>
+            <a:pPr marL="1600200" lvl="3" indent="-228600">
+              <a:buFont typeface="Arial" panose="020B0604020202020204" pitchFamily="34" charset="0"/>
+              <a:buChar char="•"/>
+            </a:pPr>
+            <a:r>
+              <a:rPr lang="en-US" altLang="zh-CN" sz="500"/>
+              <a:t>ScalarValues.kerml</a:t>
+            </a:r>
+          </a:p>
+          <a:p>
+            <a:pPr marL="1600200" lvl="3" indent="-228600">
+              <a:buFont typeface="Arial" panose="020B0604020202020204" pitchFamily="34" charset="0"/>
+              <a:buChar char="•"/>
+            </a:pPr>
+            <a:r>
+              <a:rPr lang="en-US" altLang="zh-CN" sz="500"/>
+              <a:t>Collections.kerml</a:t>
+            </a:r>
+          </a:p>
+          <a:p>
+            <a:pPr marL="1600200" lvl="3" indent="-228600">
+              <a:buFont typeface="Arial" panose="020B0604020202020204" pitchFamily="34" charset="0"/>
+              <a:buChar char="•"/>
+            </a:pPr>
+            <a:r>
+              <a:rPr lang="en-US" altLang="zh-CN" sz="500"/>
+              <a:t>VectorValues.kerml</a:t>
+            </a:r>
+          </a:p>
+          <a:p>
+            <a:pPr marL="1143000" lvl="2" indent="-228600">
+              <a:buFont typeface="Arial" panose="020B0604020202020204" pitchFamily="34" charset="0"/>
+              <a:buChar char="•"/>
+            </a:pPr>
+            <a:r>
+              <a:rPr lang="en-US" altLang="zh-CN" sz="500"/>
+              <a:t>Kernel Function Library</a:t>
+            </a:r>
+          </a:p>
+          <a:p>
+            <a:pPr marL="1600200" lvl="3" indent="-228600">
+              <a:buFont typeface="Arial" panose="020B0604020202020204" pitchFamily="34" charset="0"/>
+              <a:buChar char="•"/>
+            </a:pPr>
+            <a:r>
+              <a:rPr lang="en-US" altLang="zh-CN" sz="500"/>
+              <a:t>BaseFunctions.kerml</a:t>
+            </a:r>
+          </a:p>
+          <a:p>
+            <a:pPr marL="1600200" lvl="3" indent="-228600">
+              <a:buFont typeface="Arial" panose="020B0604020202020204" pitchFamily="34" charset="0"/>
+              <a:buChar char="•"/>
+            </a:pPr>
+            <a:r>
+              <a:rPr lang="en-US" altLang="zh-CN" sz="500"/>
+              <a:t>BooleanFunctions.kerml</a:t>
+            </a:r>
+          </a:p>
+          <a:p>
+            <a:pPr marL="1600200" lvl="3" indent="-228600">
+              <a:buFont typeface="Arial" panose="020B0604020202020204" pitchFamily="34" charset="0"/>
+              <a:buChar char="•"/>
+            </a:pPr>
+            <a:r>
+              <a:rPr lang="en-US" altLang="zh-CN" sz="500"/>
+              <a:t>CollectionFunctions.kerml</a:t>
+            </a:r>
+          </a:p>
+          <a:p>
+            <a:pPr marL="1600200" lvl="3" indent="-228600">
+              <a:buFont typeface="Arial" panose="020B0604020202020204" pitchFamily="34" charset="0"/>
+              <a:buChar char="•"/>
+            </a:pPr>
+            <a:r>
+              <a:rPr lang="en-US" altLang="zh-CN" sz="500"/>
+              <a:t>ComplexFunctions.kerml</a:t>
+            </a:r>
+          </a:p>
+          <a:p>
+            <a:pPr marL="1600200" lvl="3" indent="-228600">
+              <a:buFont typeface="Arial" panose="020B0604020202020204" pitchFamily="34" charset="0"/>
+              <a:buChar char="•"/>
+            </a:pPr>
+            <a:r>
+              <a:rPr lang="en-US" altLang="zh-CN" sz="500"/>
+              <a:t>ControlFunctions.kerml</a:t>
+            </a:r>
+          </a:p>
+          <a:p>
+            <a:pPr marL="1600200" lvl="3" indent="-228600">
+              <a:buFont typeface="Arial" panose="020B0604020202020204" pitchFamily="34" charset="0"/>
+              <a:buChar char="•"/>
+            </a:pPr>
+            <a:r>
+              <a:rPr lang="en-US" altLang="zh-CN" sz="500"/>
+              <a:t>DataFunctions.kerml</a:t>
+            </a:r>
+          </a:p>
+          <a:p>
+            <a:pPr marL="1600200" lvl="3" indent="-228600">
+              <a:buFont typeface="Arial" panose="020B0604020202020204" pitchFamily="34" charset="0"/>
+              <a:buChar char="•"/>
+            </a:pPr>
+            <a:r>
+              <a:rPr lang="en-US" altLang="zh-CN" sz="500"/>
+              <a:t>IntegerFunctions.kerml</a:t>
+            </a:r>
+          </a:p>
+          <a:p>
+            <a:pPr marL="1600200" lvl="3" indent="-228600">
+              <a:buFont typeface="Arial" panose="020B0604020202020204" pitchFamily="34" charset="0"/>
+              <a:buChar char="•"/>
+            </a:pPr>
+            <a:r>
+              <a:rPr lang="en-US" altLang="zh-CN" sz="500"/>
+              <a:t>NaturalFunctions.kerml</a:t>
+            </a:r>
+          </a:p>
+          <a:p>
+            <a:pPr marL="1600200" lvl="3" indent="-228600">
+              <a:buFont typeface="Arial" panose="020B0604020202020204" pitchFamily="34" charset="0"/>
+              <a:buChar char="•"/>
+            </a:pPr>
+            <a:r>
+              <a:rPr lang="en-US" altLang="zh-CN" sz="500"/>
+              <a:t>NumbericalFunctions.kerml</a:t>
+            </a:r>
+          </a:p>
+          <a:p>
+            <a:pPr marL="1600200" lvl="3" indent="-228600">
+              <a:buFont typeface="Arial" panose="020B0604020202020204" pitchFamily="34" charset="0"/>
+              <a:buChar char="•"/>
+            </a:pPr>
+            <a:r>
+              <a:rPr lang="en-US" altLang="zh-CN" sz="500"/>
+              <a:t>OccurrenceFunctions.kerml</a:t>
+            </a:r>
+          </a:p>
+          <a:p>
+            <a:pPr marL="1600200" lvl="3" indent="-228600">
+              <a:buFont typeface="Arial" panose="020B0604020202020204" pitchFamily="34" charset="0"/>
+              <a:buChar char="•"/>
+            </a:pPr>
+            <a:r>
+              <a:rPr lang="en-US" altLang="zh-CN" sz="500"/>
+              <a:t>RationalFunctions.kerml</a:t>
+            </a:r>
+          </a:p>
+          <a:p>
+            <a:pPr marL="1600200" lvl="3" indent="-228600">
+              <a:buFont typeface="Arial" panose="020B0604020202020204" pitchFamily="34" charset="0"/>
+              <a:buChar char="•"/>
+            </a:pPr>
+            <a:r>
+              <a:rPr lang="en-US" altLang="zh-CN" sz="500"/>
+              <a:t>RealFunctions.kerml</a:t>
+            </a:r>
+          </a:p>
+          <a:p>
+            <a:pPr marL="1600200" lvl="3" indent="-228600">
+              <a:buFont typeface="Arial" panose="020B0604020202020204" pitchFamily="34" charset="0"/>
+              <a:buChar char="•"/>
+            </a:pPr>
+            <a:r>
+              <a:rPr lang="en-US" altLang="zh-CN" sz="500"/>
+              <a:t>ScalarFunctions.kerml</a:t>
+            </a:r>
+          </a:p>
+          <a:p>
+            <a:pPr marL="1600200" lvl="3" indent="-228600">
+              <a:buFont typeface="Arial" panose="020B0604020202020204" pitchFamily="34" charset="0"/>
+              <a:buChar char="•"/>
+            </a:pPr>
+            <a:r>
+              <a:rPr lang="en-US" altLang="zh-CN" sz="500"/>
+              <a:t>SequenceFunctions.kerml</a:t>
+            </a:r>
+          </a:p>
+          <a:p>
+            <a:pPr marL="1600200" lvl="3" indent="-228600">
+              <a:buFont typeface="Arial" panose="020B0604020202020204" pitchFamily="34" charset="0"/>
+              <a:buChar char="•"/>
+            </a:pPr>
+            <a:r>
+              <a:rPr lang="en-US" altLang="zh-CN" sz="500"/>
+              <a:t>StringFunctions.kerml</a:t>
+            </a:r>
+          </a:p>
+          <a:p>
+            <a:pPr marL="1600200" lvl="3" indent="-228600">
+              <a:buFont typeface="Arial" panose="020B0604020202020204" pitchFamily="34" charset="0"/>
+              <a:buChar char="•"/>
+            </a:pPr>
+            <a:r>
+              <a:rPr lang="en-US" altLang="zh-CN" sz="500"/>
+              <a:t>TrigFunctions.kerml</a:t>
+            </a:r>
+          </a:p>
+          <a:p>
+            <a:pPr marL="1600200" lvl="3" indent="-228600">
+              <a:buFont typeface="Arial" panose="020B0604020202020204" pitchFamily="34" charset="0"/>
+              <a:buChar char="•"/>
+            </a:pPr>
+            <a:r>
+              <a:rPr lang="en-US" altLang="zh-CN" sz="500"/>
+              <a:t>VectorFunctions.kerml</a:t>
+            </a:r>
+          </a:p>
+          <a:p>
+            <a:pPr marL="742950" lvl="1" indent="-285750">
+              <a:buFont typeface="Arial" panose="020B0604020202020204" pitchFamily="34" charset="0"/>
+              <a:buChar char="•"/>
+            </a:pPr>
+            <a:endParaRPr lang="en-US" altLang="zh-CN" sz="500"/>
+          </a:p>
+        </p:txBody>
+      </p:sp>
+      <p:sp>
+        <p:nvSpPr>
+          <p:cNvPr id="13" name="文本框 12">
+            <a:extLst>
+              <a:ext uri="{FF2B5EF4-FFF2-40B4-BE49-F238E27FC236}">
+                <a16:creationId xmlns:a16="http://schemas.microsoft.com/office/drawing/2014/main" id="{6BE24A62-F6D8-B71F-FA25-697449353D94}"/>
+              </a:ext>
+            </a:extLst>
+          </p:cNvPr>
+          <p:cNvSpPr txBox="1"/>
+          <p:nvPr/>
+        </p:nvSpPr>
+        <p:spPr>
+          <a:xfrm>
+            <a:off x="5761202" y="1071111"/>
+            <a:ext cx="3389061" cy="3477875"/>
+          </a:xfrm>
+          <a:prstGeom prst="rect">
+            <a:avLst/>
+          </a:prstGeom>
+          <a:noFill/>
+        </p:spPr>
+        <p:txBody>
+          <a:bodyPr wrap="square">
+            <a:spAutoFit/>
+          </a:bodyPr>
+          <a:lstStyle/>
+          <a:p>
+            <a:pPr marL="742950" lvl="1" indent="-285750">
+              <a:buFont typeface="Arial" panose="020B0604020202020204" pitchFamily="34" charset="0"/>
+              <a:buChar char="•"/>
+            </a:pPr>
+            <a:r>
+              <a:rPr lang="en-US" altLang="zh-CN" sz="500"/>
+              <a:t>Domain Libraries</a:t>
+            </a:r>
+          </a:p>
+          <a:p>
+            <a:pPr marL="1143000" lvl="2" indent="-228600">
+              <a:buFont typeface="Arial" panose="020B0604020202020204" pitchFamily="34" charset="0"/>
+              <a:buChar char="•"/>
+            </a:pPr>
+            <a:r>
+              <a:rPr lang="en-US" altLang="zh-CN" sz="500"/>
+              <a:t>Analysis</a:t>
+            </a:r>
+          </a:p>
+          <a:p>
+            <a:pPr marL="1600200" lvl="3" indent="-228600">
+              <a:buFont typeface="Arial" panose="020B0604020202020204" pitchFamily="34" charset="0"/>
+              <a:buChar char="•"/>
+            </a:pPr>
+            <a:r>
+              <a:rPr lang="en-US" altLang="zh-CN" sz="500"/>
+              <a:t>AnalysisTooling.sysml</a:t>
+            </a:r>
+          </a:p>
+          <a:p>
+            <a:pPr marL="1600200" lvl="3" indent="-228600">
+              <a:buFont typeface="Arial" panose="020B0604020202020204" pitchFamily="34" charset="0"/>
+              <a:buChar char="•"/>
+            </a:pPr>
+            <a:r>
+              <a:rPr lang="en-US" altLang="zh-CN" sz="500"/>
+              <a:t>SampledFunctions.sysml</a:t>
+            </a:r>
+          </a:p>
+          <a:p>
+            <a:pPr marL="1600200" lvl="3" indent="-228600">
+              <a:buFont typeface="Arial" panose="020B0604020202020204" pitchFamily="34" charset="0"/>
+              <a:buChar char="•"/>
+            </a:pPr>
+            <a:r>
+              <a:rPr lang="en-US" altLang="zh-CN" sz="500"/>
+              <a:t>StateSpaceRepresentation.sysml</a:t>
+            </a:r>
+          </a:p>
+          <a:p>
+            <a:pPr marL="1600200" lvl="3" indent="-228600">
+              <a:buFont typeface="Arial" panose="020B0604020202020204" pitchFamily="34" charset="0"/>
+              <a:buChar char="•"/>
+            </a:pPr>
+            <a:r>
+              <a:rPr lang="en-US" altLang="zh-CN" sz="500"/>
+              <a:t>TradeStudies.sysml</a:t>
+            </a:r>
+          </a:p>
+          <a:p>
+            <a:pPr marL="1143000" lvl="2" indent="-228600">
+              <a:buFont typeface="Arial" panose="020B0604020202020204" pitchFamily="34" charset="0"/>
+              <a:buChar char="•"/>
+            </a:pPr>
+            <a:r>
+              <a:rPr lang="en-US" altLang="zh-CN" sz="500"/>
+              <a:t>Cause and Effect</a:t>
+            </a:r>
+          </a:p>
+          <a:p>
+            <a:pPr marL="1600200" lvl="3" indent="-228600">
+              <a:buFont typeface="Arial" panose="020B0604020202020204" pitchFamily="34" charset="0"/>
+              <a:buChar char="•"/>
+            </a:pPr>
+            <a:r>
+              <a:rPr lang="en-US" altLang="zh-CN" sz="500"/>
+              <a:t>CausationConnections.sysml</a:t>
+            </a:r>
+          </a:p>
+          <a:p>
+            <a:pPr marL="1600200" lvl="3" indent="-228600">
+              <a:buFont typeface="Arial" panose="020B0604020202020204" pitchFamily="34" charset="0"/>
+              <a:buChar char="•"/>
+            </a:pPr>
+            <a:r>
+              <a:rPr lang="en-US" altLang="zh-CN" sz="500"/>
+              <a:t>CauseAndEffect.sysml</a:t>
+            </a:r>
+          </a:p>
+          <a:p>
+            <a:pPr marL="1143000" lvl="2" indent="-228600">
+              <a:buFont typeface="Arial" panose="020B0604020202020204" pitchFamily="34" charset="0"/>
+              <a:buChar char="•"/>
+            </a:pPr>
+            <a:r>
+              <a:rPr lang="en-US" altLang="zh-CN" sz="500"/>
+              <a:t>Geometry</a:t>
+            </a:r>
+          </a:p>
+          <a:p>
+            <a:pPr marL="1600200" lvl="3" indent="-228600">
+              <a:buFont typeface="Arial" panose="020B0604020202020204" pitchFamily="34" charset="0"/>
+              <a:buChar char="•"/>
+            </a:pPr>
+            <a:r>
+              <a:rPr lang="en-US" altLang="zh-CN" sz="500"/>
+              <a:t>ShapeItems.sysml</a:t>
+            </a:r>
+          </a:p>
+          <a:p>
+            <a:pPr marL="1600200" lvl="3" indent="-228600">
+              <a:buFont typeface="Arial" panose="020B0604020202020204" pitchFamily="34" charset="0"/>
+              <a:buChar char="•"/>
+            </a:pPr>
+            <a:r>
+              <a:rPr lang="en-US" altLang="zh-CN" sz="500"/>
+              <a:t>SpatialItems.sysml</a:t>
+            </a:r>
+          </a:p>
+          <a:p>
+            <a:pPr marL="1143000" lvl="2" indent="-228600">
+              <a:buFont typeface="Arial" panose="020B0604020202020204" pitchFamily="34" charset="0"/>
+              <a:buChar char="•"/>
+            </a:pPr>
+            <a:r>
+              <a:rPr lang="en-US" altLang="zh-CN" sz="500"/>
+              <a:t>Metadata</a:t>
+            </a:r>
+          </a:p>
+          <a:p>
+            <a:pPr marL="1600200" lvl="3" indent="-228600">
+              <a:buFont typeface="Arial" panose="020B0604020202020204" pitchFamily="34" charset="0"/>
+              <a:buChar char="•"/>
+            </a:pPr>
+            <a:r>
+              <a:rPr lang="en-US" altLang="zh-CN" sz="500"/>
+              <a:t>ImageMetadata.sysml</a:t>
+            </a:r>
+          </a:p>
+          <a:p>
+            <a:pPr marL="1600200" lvl="3" indent="-228600">
+              <a:buFont typeface="Arial" panose="020B0604020202020204" pitchFamily="34" charset="0"/>
+              <a:buChar char="•"/>
+            </a:pPr>
+            <a:r>
+              <a:rPr lang="en-US" altLang="zh-CN" sz="500"/>
+              <a:t>ModelingMetadata.sysml</a:t>
+            </a:r>
+          </a:p>
+          <a:p>
+            <a:pPr marL="1600200" lvl="3" indent="-228600">
+              <a:buFont typeface="Arial" panose="020B0604020202020204" pitchFamily="34" charset="0"/>
+              <a:buChar char="•"/>
+            </a:pPr>
+            <a:r>
+              <a:rPr lang="en-US" altLang="zh-CN" sz="500"/>
+              <a:t>ParameterOfInterestMetadata.sysml</a:t>
+            </a:r>
+          </a:p>
+          <a:p>
+            <a:pPr marL="1600200" lvl="3" indent="-228600">
+              <a:buFont typeface="Arial" panose="020B0604020202020204" pitchFamily="34" charset="0"/>
+              <a:buChar char="•"/>
+            </a:pPr>
+            <a:r>
+              <a:rPr lang="en-US" altLang="zh-CN" sz="500"/>
+              <a:t>RiskMetadata.sysml</a:t>
+            </a:r>
+          </a:p>
+          <a:p>
+            <a:pPr marL="1143000" lvl="2" indent="-228600">
+              <a:buFont typeface="Arial" panose="020B0604020202020204" pitchFamily="34" charset="0"/>
+              <a:buChar char="•"/>
+            </a:pPr>
+            <a:r>
+              <a:rPr lang="en-US" altLang="zh-CN" sz="500"/>
+              <a:t>Quantities and Units</a:t>
+            </a:r>
+          </a:p>
+          <a:p>
+            <a:pPr marL="1600200" lvl="3" indent="-228600">
+              <a:buFont typeface="Arial" panose="020B0604020202020204" pitchFamily="34" charset="0"/>
+              <a:buChar char="•"/>
+            </a:pPr>
+            <a:r>
+              <a:rPr lang="en-US" altLang="zh-CN" sz="500"/>
+              <a:t>ISQ.sysml</a:t>
+            </a:r>
+          </a:p>
+          <a:p>
+            <a:pPr marL="1600200" lvl="3" indent="-228600">
+              <a:buFont typeface="Arial" panose="020B0604020202020204" pitchFamily="34" charset="0"/>
+              <a:buChar char="•"/>
+            </a:pPr>
+            <a:r>
+              <a:rPr lang="en-US" altLang="zh-CN" sz="500"/>
+              <a:t>ISQAcoustics.sysml</a:t>
+            </a:r>
+          </a:p>
+          <a:p>
+            <a:pPr marL="1600200" lvl="3" indent="-228600">
+              <a:buFont typeface="Arial" panose="020B0604020202020204" pitchFamily="34" charset="0"/>
+              <a:buChar char="•"/>
+            </a:pPr>
+            <a:r>
+              <a:rPr lang="en-US" altLang="zh-CN" sz="500"/>
+              <a:t>ISQAtomicNuclear.sysml</a:t>
+            </a:r>
+          </a:p>
+          <a:p>
+            <a:pPr marL="1600200" lvl="3" indent="-228600">
+              <a:buFont typeface="Arial" panose="020B0604020202020204" pitchFamily="34" charset="0"/>
+              <a:buChar char="•"/>
+            </a:pPr>
+            <a:r>
+              <a:rPr lang="en-US" altLang="zh-CN" sz="500"/>
+              <a:t>ISQBase.sysml</a:t>
+            </a:r>
+          </a:p>
+          <a:p>
+            <a:pPr marL="1600200" lvl="3" indent="-228600">
+              <a:buFont typeface="Arial" panose="020B0604020202020204" pitchFamily="34" charset="0"/>
+              <a:buChar char="•"/>
+            </a:pPr>
+            <a:r>
+              <a:rPr lang="en-US" altLang="zh-CN" sz="500"/>
+              <a:t>ISQCharacteristicNumbers.sysml</a:t>
+            </a:r>
+          </a:p>
+          <a:p>
+            <a:pPr marL="1600200" lvl="3" indent="-228600">
+              <a:buFont typeface="Arial" panose="020B0604020202020204" pitchFamily="34" charset="0"/>
+              <a:buChar char="•"/>
+            </a:pPr>
+            <a:r>
+              <a:rPr lang="en-US" altLang="zh-CN" sz="500"/>
+              <a:t>ISQChemistryMolecular.sysml</a:t>
+            </a:r>
+          </a:p>
+          <a:p>
+            <a:pPr marL="1600200" lvl="3" indent="-228600">
+              <a:buFont typeface="Arial" panose="020B0604020202020204" pitchFamily="34" charset="0"/>
+              <a:buChar char="•"/>
+            </a:pPr>
+            <a:r>
+              <a:rPr lang="en-US" altLang="zh-CN" sz="500"/>
+              <a:t>ISQCondensedMatter.sysml</a:t>
+            </a:r>
+          </a:p>
+          <a:p>
+            <a:pPr marL="1600200" lvl="3" indent="-228600">
+              <a:buFont typeface="Arial" panose="020B0604020202020204" pitchFamily="34" charset="0"/>
+              <a:buChar char="•"/>
+            </a:pPr>
+            <a:r>
+              <a:rPr lang="en-US" altLang="zh-CN" sz="500"/>
+              <a:t>ISQElectromagnetism.sysml</a:t>
+            </a:r>
+          </a:p>
+          <a:p>
+            <a:pPr marL="1600200" lvl="3" indent="-228600">
+              <a:buFont typeface="Arial" panose="020B0604020202020204" pitchFamily="34" charset="0"/>
+              <a:buChar char="•"/>
+            </a:pPr>
+            <a:r>
+              <a:rPr lang="en-US" altLang="zh-CN" sz="500"/>
+              <a:t>ISQInformation.sysml</a:t>
+            </a:r>
+          </a:p>
+          <a:p>
+            <a:pPr marL="1600200" lvl="3" indent="-228600">
+              <a:buFont typeface="Arial" panose="020B0604020202020204" pitchFamily="34" charset="0"/>
+              <a:buChar char="•"/>
+            </a:pPr>
+            <a:r>
+              <a:rPr lang="en-US" altLang="zh-CN" sz="500"/>
+              <a:t>ISQLight.sysml</a:t>
+            </a:r>
+          </a:p>
+          <a:p>
+            <a:pPr marL="1600200" lvl="3" indent="-228600">
+              <a:buFont typeface="Arial" panose="020B0604020202020204" pitchFamily="34" charset="0"/>
+              <a:buChar char="•"/>
+            </a:pPr>
+            <a:r>
+              <a:rPr lang="en-US" altLang="zh-CN" sz="500"/>
+              <a:t>ISQMechanics.sysml</a:t>
+            </a:r>
+          </a:p>
+          <a:p>
+            <a:pPr marL="1600200" lvl="3" indent="-228600">
+              <a:buFont typeface="Arial" panose="020B0604020202020204" pitchFamily="34" charset="0"/>
+              <a:buChar char="•"/>
+            </a:pPr>
+            <a:r>
+              <a:rPr lang="en-US" altLang="zh-CN" sz="500"/>
+              <a:t>ISQSpaceTime.sysml</a:t>
+            </a:r>
+          </a:p>
+          <a:p>
+            <a:pPr marL="1600200" lvl="3" indent="-228600">
+              <a:buFont typeface="Arial" panose="020B0604020202020204" pitchFamily="34" charset="0"/>
+              <a:buChar char="•"/>
+            </a:pPr>
+            <a:r>
+              <a:rPr lang="en-US" altLang="zh-CN" sz="500"/>
+              <a:t>ISQThermodynamtics.sysml</a:t>
+            </a:r>
+          </a:p>
+          <a:p>
+            <a:pPr marL="1600200" lvl="3" indent="-228600">
+              <a:buFont typeface="Arial" panose="020B0604020202020204" pitchFamily="34" charset="0"/>
+              <a:buChar char="•"/>
+            </a:pPr>
+            <a:r>
+              <a:rPr lang="en-US" altLang="zh-CN" sz="500"/>
+              <a:t>MeasurementRefCalculations.sysml</a:t>
+            </a:r>
+          </a:p>
+          <a:p>
+            <a:pPr marL="1600200" lvl="3" indent="-228600">
+              <a:buFont typeface="Arial" panose="020B0604020202020204" pitchFamily="34" charset="0"/>
+              <a:buChar char="•"/>
+            </a:pPr>
+            <a:r>
+              <a:rPr lang="en-US" altLang="zh-CN" sz="500"/>
+              <a:t>MeasurementReferences.sysml</a:t>
+            </a:r>
+          </a:p>
+          <a:p>
+            <a:pPr marL="1600200" lvl="3" indent="-228600">
+              <a:buFont typeface="Arial" panose="020B0604020202020204" pitchFamily="34" charset="0"/>
+              <a:buChar char="•"/>
+            </a:pPr>
+            <a:r>
+              <a:rPr lang="en-US" altLang="zh-CN" sz="500"/>
+              <a:t>Quantities.sysml</a:t>
+            </a:r>
+          </a:p>
+          <a:p>
+            <a:pPr marL="1600200" lvl="3" indent="-228600">
+              <a:buFont typeface="Arial" panose="020B0604020202020204" pitchFamily="34" charset="0"/>
+              <a:buChar char="•"/>
+            </a:pPr>
+            <a:r>
+              <a:rPr lang="en-US" altLang="zh-CN" sz="500"/>
+              <a:t>QuantityCalculations.sysml</a:t>
+            </a:r>
+          </a:p>
+          <a:p>
+            <a:pPr marL="1600200" lvl="3" indent="-228600">
+              <a:buFont typeface="Arial" panose="020B0604020202020204" pitchFamily="34" charset="0"/>
+              <a:buChar char="•"/>
+            </a:pPr>
+            <a:r>
+              <a:rPr lang="en-US" altLang="zh-CN" sz="500"/>
+              <a:t>SI.sysml</a:t>
+            </a:r>
+          </a:p>
+          <a:p>
+            <a:pPr marL="1600200" lvl="3" indent="-228600">
+              <a:buFont typeface="Arial" panose="020B0604020202020204" pitchFamily="34" charset="0"/>
+              <a:buChar char="•"/>
+            </a:pPr>
+            <a:r>
+              <a:rPr lang="en-US" altLang="zh-CN" sz="500"/>
+              <a:t>SIPrefixes.sysml</a:t>
+            </a:r>
+          </a:p>
+          <a:p>
+            <a:pPr marL="1600200" lvl="3" indent="-228600">
+              <a:buFont typeface="Arial" panose="020B0604020202020204" pitchFamily="34" charset="0"/>
+              <a:buChar char="•"/>
+            </a:pPr>
+            <a:r>
+              <a:rPr lang="en-US" altLang="zh-CN" sz="500"/>
+              <a:t>TensorCalculations.sysml</a:t>
+            </a:r>
+          </a:p>
+          <a:p>
+            <a:pPr marL="1600200" lvl="3" indent="-228600">
+              <a:buFont typeface="Arial" panose="020B0604020202020204" pitchFamily="34" charset="0"/>
+              <a:buChar char="•"/>
+            </a:pPr>
+            <a:r>
+              <a:rPr lang="en-US" altLang="zh-CN" sz="500"/>
+              <a:t>Time.sysml</a:t>
+            </a:r>
+          </a:p>
+          <a:p>
+            <a:pPr marL="1600200" lvl="3" indent="-228600">
+              <a:buFont typeface="Arial" panose="020B0604020202020204" pitchFamily="34" charset="0"/>
+              <a:buChar char="•"/>
+            </a:pPr>
+            <a:r>
+              <a:rPr lang="en-US" altLang="zh-CN" sz="500"/>
+              <a:t>USCustomaryUnits.sysml</a:t>
+            </a:r>
+          </a:p>
+          <a:p>
+            <a:pPr marL="1600200" lvl="3" indent="-228600">
+              <a:buFont typeface="Arial" panose="020B0604020202020204" pitchFamily="34" charset="0"/>
+              <a:buChar char="•"/>
+            </a:pPr>
+            <a:r>
+              <a:rPr lang="en-US" altLang="zh-CN" sz="500"/>
+              <a:t>VectorCalculations.sysml</a:t>
+            </a:r>
+          </a:p>
+          <a:p>
+            <a:pPr marL="1143000" lvl="2" indent="-228600">
+              <a:buFont typeface="Arial" panose="020B0604020202020204" pitchFamily="34" charset="0"/>
+              <a:buChar char="•"/>
+            </a:pPr>
+            <a:r>
+              <a:rPr lang="en-US" altLang="zh-CN" sz="500"/>
+              <a:t>Requriement Derivation</a:t>
+            </a:r>
+          </a:p>
+          <a:p>
+            <a:pPr marL="1600200" lvl="3" indent="-228600">
+              <a:buFont typeface="Arial" panose="020B0604020202020204" pitchFamily="34" charset="0"/>
+              <a:buChar char="•"/>
+            </a:pPr>
+            <a:r>
+              <a:rPr lang="en-US" altLang="zh-CN" sz="500"/>
+              <a:t>DericationConnections.sysml</a:t>
+            </a:r>
+          </a:p>
+          <a:p>
+            <a:pPr marL="1600200" lvl="3" indent="-228600">
+              <a:buFont typeface="Arial" panose="020B0604020202020204" pitchFamily="34" charset="0"/>
+              <a:buChar char="•"/>
+            </a:pPr>
+            <a:r>
+              <a:rPr lang="en-US" altLang="zh-CN" sz="500"/>
+              <a:t>RequirementDerivation.sysml</a:t>
+            </a:r>
+            <a:endParaRPr lang="zh-CN" altLang="en-US" sz="500"/>
+          </a:p>
+        </p:txBody>
+      </p:sp>
+      <p:sp>
+        <p:nvSpPr>
+          <p:cNvPr id="15" name="文本框 14">
+            <a:extLst>
+              <a:ext uri="{FF2B5EF4-FFF2-40B4-BE49-F238E27FC236}">
+                <a16:creationId xmlns:a16="http://schemas.microsoft.com/office/drawing/2014/main" id="{56961C60-6BA0-F838-E434-43CDC176582E}"/>
+              </a:ext>
+            </a:extLst>
+          </p:cNvPr>
+          <p:cNvSpPr txBox="1"/>
+          <p:nvPr/>
+        </p:nvSpPr>
+        <p:spPr>
+          <a:xfrm>
+            <a:off x="2763915" y="1071111"/>
+            <a:ext cx="2835996" cy="1785104"/>
+          </a:xfrm>
+          <a:prstGeom prst="rect">
+            <a:avLst/>
+          </a:prstGeom>
+          <a:noFill/>
+        </p:spPr>
+        <p:txBody>
+          <a:bodyPr wrap="square">
+            <a:spAutoFit/>
+          </a:bodyPr>
+          <a:lstStyle/>
+          <a:p>
+            <a:pPr marL="742950" lvl="1" indent="-285750">
+              <a:buFont typeface="Arial" panose="020B0604020202020204" pitchFamily="34" charset="0"/>
+              <a:buChar char="•"/>
+            </a:pPr>
+            <a:r>
+              <a:rPr lang="en-US" altLang="zh-CN" sz="500"/>
+              <a:t>Systems Library</a:t>
+            </a:r>
+          </a:p>
+          <a:p>
+            <a:pPr marL="1143000" lvl="2" indent="-228600">
+              <a:buFont typeface="Arial" panose="020B0604020202020204" pitchFamily="34" charset="0"/>
+              <a:buChar char="•"/>
+            </a:pPr>
+            <a:r>
+              <a:rPr lang="en-US" altLang="zh-CN" sz="500"/>
+              <a:t>Systems Library</a:t>
+            </a:r>
+          </a:p>
+          <a:p>
+            <a:pPr marL="1600200" lvl="3" indent="-228600">
+              <a:buFont typeface="Arial" panose="020B0604020202020204" pitchFamily="34" charset="0"/>
+              <a:buChar char="•"/>
+            </a:pPr>
+            <a:r>
+              <a:rPr lang="en-US" altLang="zh-CN" sz="500"/>
+              <a:t>Actions.sysml</a:t>
+            </a:r>
+          </a:p>
+          <a:p>
+            <a:pPr marL="1600200" lvl="3" indent="-228600">
+              <a:buFont typeface="Arial" panose="020B0604020202020204" pitchFamily="34" charset="0"/>
+              <a:buChar char="•"/>
+            </a:pPr>
+            <a:r>
+              <a:rPr lang="en-US" altLang="zh-CN" sz="500"/>
+              <a:t>Allocations.sysml</a:t>
+            </a:r>
+          </a:p>
+          <a:p>
+            <a:pPr marL="1600200" lvl="3" indent="-228600">
+              <a:buFont typeface="Arial" panose="020B0604020202020204" pitchFamily="34" charset="0"/>
+              <a:buChar char="•"/>
+            </a:pPr>
+            <a:r>
+              <a:rPr lang="en-US" altLang="zh-CN" sz="500"/>
+              <a:t>AnalysisCases.sysml</a:t>
+            </a:r>
+          </a:p>
+          <a:p>
+            <a:pPr marL="1600200" lvl="3" indent="-228600">
+              <a:buFont typeface="Arial" panose="020B0604020202020204" pitchFamily="34" charset="0"/>
+              <a:buChar char="•"/>
+            </a:pPr>
+            <a:r>
+              <a:rPr lang="en-US" altLang="zh-CN" sz="500"/>
+              <a:t>Attributes.sysml</a:t>
+            </a:r>
+          </a:p>
+          <a:p>
+            <a:pPr marL="1600200" lvl="3" indent="-228600">
+              <a:buFont typeface="Arial" panose="020B0604020202020204" pitchFamily="34" charset="0"/>
+              <a:buChar char="•"/>
+            </a:pPr>
+            <a:r>
+              <a:rPr lang="en-US" altLang="zh-CN" sz="500"/>
+              <a:t>Calculations.sysml</a:t>
+            </a:r>
+          </a:p>
+          <a:p>
+            <a:pPr marL="1600200" lvl="3" indent="-228600">
+              <a:buFont typeface="Arial" panose="020B0604020202020204" pitchFamily="34" charset="0"/>
+              <a:buChar char="•"/>
+            </a:pPr>
+            <a:r>
+              <a:rPr lang="en-US" altLang="zh-CN" sz="500"/>
+              <a:t>Cases.sysml</a:t>
+            </a:r>
+          </a:p>
+          <a:p>
+            <a:pPr marL="1600200" lvl="3" indent="-228600">
+              <a:buFont typeface="Arial" panose="020B0604020202020204" pitchFamily="34" charset="0"/>
+              <a:buChar char="•"/>
+            </a:pPr>
+            <a:r>
+              <a:rPr lang="en-US" altLang="zh-CN" sz="500"/>
+              <a:t>Connections.sysml</a:t>
+            </a:r>
+          </a:p>
+          <a:p>
+            <a:pPr marL="1600200" lvl="3" indent="-228600">
+              <a:buFont typeface="Arial" panose="020B0604020202020204" pitchFamily="34" charset="0"/>
+              <a:buChar char="•"/>
+            </a:pPr>
+            <a:r>
+              <a:rPr lang="en-US" altLang="zh-CN" sz="500"/>
+              <a:t>Constraints.sysml</a:t>
+            </a:r>
+          </a:p>
+          <a:p>
+            <a:pPr marL="1600200" lvl="3" indent="-228600">
+              <a:buFont typeface="Arial" panose="020B0604020202020204" pitchFamily="34" charset="0"/>
+              <a:buChar char="•"/>
+            </a:pPr>
+            <a:r>
+              <a:rPr lang="en-US" altLang="zh-CN" sz="500"/>
+              <a:t>Interfaces.sysml</a:t>
+            </a:r>
+          </a:p>
+          <a:p>
+            <a:pPr marL="1600200" lvl="3" indent="-228600">
+              <a:buFont typeface="Arial" panose="020B0604020202020204" pitchFamily="34" charset="0"/>
+              <a:buChar char="•"/>
+            </a:pPr>
+            <a:r>
+              <a:rPr lang="en-US" altLang="zh-CN" sz="500"/>
+              <a:t>Items.sysml</a:t>
+            </a:r>
+          </a:p>
+          <a:p>
+            <a:pPr marL="1600200" lvl="3" indent="-228600">
+              <a:buFont typeface="Arial" panose="020B0604020202020204" pitchFamily="34" charset="0"/>
+              <a:buChar char="•"/>
+            </a:pPr>
+            <a:r>
+              <a:rPr lang="en-US" altLang="zh-CN" sz="500"/>
+              <a:t>Metadata.sysml</a:t>
+            </a:r>
+          </a:p>
+          <a:p>
+            <a:pPr marL="1600200" lvl="3" indent="-228600">
+              <a:buFont typeface="Arial" panose="020B0604020202020204" pitchFamily="34" charset="0"/>
+              <a:buChar char="•"/>
+            </a:pPr>
+            <a:r>
+              <a:rPr lang="en-US" altLang="zh-CN" sz="500"/>
+              <a:t>Parts.sysml</a:t>
+            </a:r>
+          </a:p>
+          <a:p>
+            <a:pPr marL="1600200" lvl="3" indent="-228600">
+              <a:buFont typeface="Arial" panose="020B0604020202020204" pitchFamily="34" charset="0"/>
+              <a:buChar char="•"/>
+            </a:pPr>
+            <a:r>
+              <a:rPr lang="en-US" altLang="zh-CN" sz="500"/>
+              <a:t>Ports.sysml</a:t>
+            </a:r>
+          </a:p>
+          <a:p>
+            <a:pPr marL="1600200" lvl="3" indent="-228600">
+              <a:buFont typeface="Arial" panose="020B0604020202020204" pitchFamily="34" charset="0"/>
+              <a:buChar char="•"/>
+            </a:pPr>
+            <a:r>
+              <a:rPr lang="en-US" altLang="zh-CN" sz="500"/>
+              <a:t>Requirements.sysml</a:t>
+            </a:r>
+          </a:p>
+          <a:p>
+            <a:pPr marL="1600200" lvl="3" indent="-228600">
+              <a:buFont typeface="Arial" panose="020B0604020202020204" pitchFamily="34" charset="0"/>
+              <a:buChar char="•"/>
+            </a:pPr>
+            <a:r>
+              <a:rPr lang="en-US" altLang="zh-CN" sz="500"/>
+              <a:t>StandardViewDefinitions.sysml</a:t>
+            </a:r>
+          </a:p>
+          <a:p>
+            <a:pPr marL="1600200" lvl="3" indent="-228600">
+              <a:buFont typeface="Arial" panose="020B0604020202020204" pitchFamily="34" charset="0"/>
+              <a:buChar char="•"/>
+            </a:pPr>
+            <a:r>
+              <a:rPr lang="en-US" altLang="zh-CN" sz="500"/>
+              <a:t>States.sysml</a:t>
+            </a:r>
+          </a:p>
+          <a:p>
+            <a:pPr marL="1600200" lvl="3" indent="-228600">
+              <a:buFont typeface="Arial" panose="020B0604020202020204" pitchFamily="34" charset="0"/>
+              <a:buChar char="•"/>
+            </a:pPr>
+            <a:r>
+              <a:rPr lang="en-US" altLang="zh-CN" sz="500"/>
+              <a:t>SysML.sysml</a:t>
+            </a:r>
+          </a:p>
+          <a:p>
+            <a:pPr marL="1600200" lvl="3" indent="-228600">
+              <a:buFont typeface="Arial" panose="020B0604020202020204" pitchFamily="34" charset="0"/>
+              <a:buChar char="•"/>
+            </a:pPr>
+            <a:r>
+              <a:rPr lang="en-US" altLang="zh-CN" sz="500"/>
+              <a:t>UseCases.sysml</a:t>
+            </a:r>
+          </a:p>
+          <a:p>
+            <a:pPr marL="1600200" lvl="3" indent="-228600">
+              <a:buFont typeface="Arial" panose="020B0604020202020204" pitchFamily="34" charset="0"/>
+              <a:buChar char="•"/>
+            </a:pPr>
+            <a:r>
+              <a:rPr lang="en-US" altLang="zh-CN" sz="500"/>
+              <a:t>Verifications.sysml</a:t>
+            </a:r>
+          </a:p>
+          <a:p>
+            <a:pPr marL="1600200" lvl="3" indent="-228600">
+              <a:buFont typeface="Arial" panose="020B0604020202020204" pitchFamily="34" charset="0"/>
+              <a:buChar char="•"/>
+            </a:pPr>
+            <a:r>
+              <a:rPr lang="en-US" altLang="zh-CN" sz="500"/>
+              <a:t>Views.sysml</a:t>
+            </a:r>
+          </a:p>
+        </p:txBody>
+      </p:sp>
+    </p:spTree>
+    <p:extLst>
+      <p:ext uri="{BB962C8B-B14F-4D97-AF65-F5344CB8AC3E}">
+        <p14:creationId xmlns:p14="http://schemas.microsoft.com/office/powerpoint/2010/main" val="1817385654"/>
       </p:ext>
     </p:extLst>
   </p:cSld>
